--- a/presentation/crossborder_career_presentation.pptx
+++ b/presentation/crossborder_career_presentation.pptx
@@ -13,9 +13,10 @@
     <p:sldId id="261" r:id="rId7"/>
     <p:sldId id="262" r:id="rId8"/>
     <p:sldId id="263" r:id="rId9"/>
+    <p:sldId id="264" r:id="rId10"/>
   </p:sldIdLst>
   <p:notesMasterIdLst>
-    <p:notesMasterId r:id="rId10"/>
+    <p:notesMasterId r:id="rId11"/>
   </p:notesMasterIdLst>
   <p:sldSz cx="9144000" cy="5143500"/>
   <p:notesSz cx="5143500" cy="9144000"/>
@@ -773,7 +774,7 @@
           <a:p>
             <a:r>
               <a:rPr lang="en-US" dirty="0"/>
-              <a:t>二つ目は、サービス支給量の決定基準が制定されたことです。受給者証の支給日数の上限が、手帳や個別サポートの有無で決まるようになりました。これまで利用していた方が支給日数を減らされ、「お留守番ができるのか」「行き場がすぐに見つからない」「放課後等デイサービスに通っているなら児童クラブは利用できないと断られた」といった不安の声が多く聞かれました。キャレオスには放課後児童クラブの委託事業があります。愛媛でも参入の機会があるのではないかと考えました。（約50秒）</a:t>
+              <a:t>二つ目は、サービス支給量の決定基準の制定です。支給日数の上限が手帳や個別サポートの有無で決まるようになり、日数を減らされた方から「お留守番ができるのか」「行き場が見つからない」「放デイ利用中を理由に児童クラブを断られた」という不安の声が聞かれました。キャレオスには放課後児童クラブの委託事業があり、愛媛でも参入の機会があると考えました。（約40秒）</a:t>
             </a:r>
             <a:endParaRPr lang="en-US" dirty="0"/>
           </a:p>
@@ -861,7 +862,7 @@
           <a:p>
             <a:r>
               <a:rPr lang="en-US" dirty="0"/>
-              <a:t>三つ目は、愛媛でナンバーワンになるためです。愛媛には、児童発達支援、就労継続支援、相談支援、グループホーム、介護などを多数展開し、地域の福祉を支えている来島会のような法人があります。10年後、20年後を見据えると、総量規制の始まりや人口減少の中で選ばれ続けるには、地域に根差した福祉を、同等かそれ以上のトータルサポートで提供しなければなりません。（約40秒）</a:t>
+              <a:t>三つ目は、愛媛でナンバーワンになるためです。愛媛には来島会のように、児童から就労、介護まで多数展開する法人があります。総量規制や人口減少の中で選ばれ続けるには、同等以上のトータルサポートを地域に根差して提供する必要があります。（約30秒）</a:t>
             </a:r>
             <a:endParaRPr lang="en-US" dirty="0"/>
           </a:p>
@@ -949,7 +950,7 @@
           <a:p>
             <a:r>
               <a:rPr lang="en-US" dirty="0"/>
-              <a:t>そのきっかけとして、クロスボーダーで第三管理部、地域共創課、ソーシャルカレッジリッツ、ラトリエトゥボナペティ、生活介護、相談支援など、数多くの事業部と連携し、学びを得たいと考えています。放課後等デイサービスという自分のボーダーを越え、ライフステージ全体を支える視点を身につけます。（約30秒）</a:t>
+              <a:t>クロスボーダーで関わりたいのは、第三管理部の事業開発課・地域共創係と、マーケティング課・トータルサポート推進係です。地域共創係では、市場調査や事業計画、行政との協議といった新規事業の立ち上げ方と、自治体や地域企業、学校と関係を築く動き方を学びたいです。トータルサポート推進係では、キャレオスのトータルサポートの全体像と事業部どうしのつなぎ方、そして放課後等デイサービスから就労へ切れ目なくつなぐ導線づくりを学びたいと考えています。現場で聞いた愛媛の声と、本部の知識と動き方を掛け合わせて、自分のボーダーを越えます。（約45秒）</a:t>
             </a:r>
             <a:endParaRPr lang="en-US" dirty="0"/>
           </a:p>
@@ -1037,7 +1038,7 @@
           <a:p>
             <a:r>
               <a:rPr lang="en-US" dirty="0"/>
-              <a:t>ここからは、まだ妄想の域を出ない仮構想です。まず愛媛で、放課後等デイサービス、児童クラブ、就労へとつながるトータルサポートの形をつくります。次に四国支社として、愛媛だけでなく四国全域へ。インドネシアの特定技能などの人材も含めて考えています。そして関西支社、中部支社と、全国へトータルサポートを広げていく。その始まりを愛媛で実践する人材になりたいと考えています。まだキャレオスにいない人材、ポジションだからこそ、それを確立させることに価値があると思っています。（約60秒）</a:t>
+              <a:t>具体的な第一歩として、愛媛に就労継続支援B型をつくる構想を試算しました。西条市で定員20名、2027年4月開設を想定した標準シナリオでは、1日の平均利用者18人で、6か月目に単月黒字、27か月目に初期投資を回収、3年目の営業利益は約1,140万円です。ポイントは二つです。採算ラインは1日12人前後で、放デイの卒業生の受け皿になれるかが集客の土台になること。そして平均工賃1.8万円の壁を越える作業の開拓です。この試算を実際の数字で磨き上げることも、地域共創係・推進係で学びたいことです。（約45秒）</a:t>
             </a:r>
             <a:endParaRPr lang="en-US" dirty="0"/>
           </a:p>
@@ -1125,7 +1126,7 @@
           <a:p>
             <a:r>
               <a:rPr lang="en-US" dirty="0"/>
-              <a:t>「ゆうゆうを卒業したあとも安心できる」と言っていただける地域をつくるために。全国にトータルサポートを届ける、その始まりを愛媛で実践する人材になります。ご清聴ありがとうございました。（約20秒）</a:t>
+              <a:t>ここからは、まだ妄想の域を出ない仮構想です。まず愛媛で、B型を第一歩に、放課後等デイサービス、児童クラブ、就労をつなぐトータルサポートの形をつくります。次に四国支社として、愛媛だけでなく四国全域へ。インドネシアの特定技能などの人材も含めて考えています。そして関西支社、中部支社と、全国へ広げていく。まだキャレオスにいない人材、ポジションだからこそ、それを確立させることに価値があると思っています。（約45秒）</a:t>
             </a:r>
             <a:endParaRPr lang="en-US" dirty="0"/>
           </a:p>
@@ -1149,6 +1150,94 @@
             <a:fld id="{F7021451-1387-4CA6-816F-3879F97B5CBC}" type="slidenum">
               <a:rPr lang="en-US"/>
               <a:t>8</a:t>
+            </a:fld>
+            <a:endParaRPr lang="en-US"/>
+          </a:p>
+        </p:txBody>
+      </p:sp>
+    </p:spTree>
+    <p:extLst>
+      <p:ext uri="{BB962C8B-B14F-4D97-AF65-F5344CB8AC3E}">
+        <p14:creationId xmlns:p14="http://schemas.microsoft.com/office/powerpoint/2010/main" val="1024086991"/>
+      </p:ext>
+    </p:extLst>
+  </p:cSld>
+  <p:clrMapOvr>
+    <a:masterClrMapping/>
+  </p:clrMapOvr>
+</p:notes>
+</file>
+
+<file path=ppt/notesSlides/notesSlide9.xml><?xml version="1.0" encoding="utf-8"?>
+<p:notes xmlns:a="http://schemas.openxmlformats.org/drawingml/2006/main" xmlns:r="http://schemas.openxmlformats.org/officeDocument/2006/relationships" xmlns:p="http://schemas.openxmlformats.org/presentationml/2006/main">
+  <p:cSld>
+    <p:spTree>
+      <p:nvGrpSpPr>
+        <p:cNvPr id="1" name=""/>
+        <p:cNvGrpSpPr/>
+        <p:nvPr/>
+      </p:nvGrpSpPr>
+      <p:grpSpPr>
+        <a:xfrm>
+          <a:off x="0" y="0"/>
+          <a:ext cx="0" cy="0"/>
+          <a:chOff x="0" y="0"/>
+          <a:chExt cx="0" cy="0"/>
+        </a:xfrm>
+      </p:grpSpPr>
+      <p:sp>
+        <p:nvSpPr>
+          <p:cNvPr id="2" name="Slide Image Placeholder 1"/>
+          <p:cNvSpPr>
+            <a:spLocks noGrp="1" noRot="1" noChangeAspect="1"/>
+          </p:cNvSpPr>
+          <p:nvPr>
+            <p:ph type="sldImg"/>
+          </p:nvPr>
+        </p:nvSpPr>
+        <p:spPr/>
+      </p:sp>
+      <p:sp>
+        <p:nvSpPr>
+          <p:cNvPr id="3" name="Notes Placeholder 2"/>
+          <p:cNvSpPr>
+            <a:spLocks noGrp="1"/>
+          </p:cNvSpPr>
+          <p:nvPr>
+            <p:ph type="body" idx="1"/>
+          </p:nvPr>
+        </p:nvSpPr>
+        <p:spPr/>
+        <p:txBody>
+          <a:bodyPr/>
+          <a:lstStyle/>
+          <a:p>
+            <a:r>
+              <a:rPr lang="en-US" dirty="0"/>
+              <a:t>「ゆうゆうを卒業したあとも安心できる」と言っていただける地域をつくるために。全国にトータルサポートを届ける、その始まりを愛媛で実践する人材になります。ご清聴ありがとうございました。（約20秒）</a:t>
+            </a:r>
+            <a:endParaRPr lang="en-US" dirty="0"/>
+          </a:p>
+        </p:txBody>
+      </p:sp>
+      <p:sp>
+        <p:nvSpPr>
+          <p:cNvPr id="4" name="Slide Number Placeholder 3"/>
+          <p:cNvSpPr>
+            <a:spLocks noGrp="1"/>
+          </p:cNvSpPr>
+          <p:nvPr>
+            <p:ph type="sldNum" sz="quarter" idx="10"/>
+          </p:nvPr>
+        </p:nvSpPr>
+        <p:spPr/>
+        <p:txBody>
+          <a:bodyPr/>
+          <a:lstStyle/>
+          <a:p>
+            <a:fld id="{F7021451-1387-4CA6-816F-3879F97B5CBC}" type="slidenum">
+              <a:rPr lang="en-US"/>
+              <a:t>9</a:t>
             </a:fld>
             <a:endParaRPr lang="en-US"/>
           </a:p>
@@ -5979,7 +6068,7 @@
                 <a:ea typeface="Meiryo UI" pitchFamily="34" charset="-122"/>
                 <a:cs typeface="Meiryo UI" pitchFamily="34" charset="-120"/>
               </a:rPr>
-              <a:t>クロスボーダーで、自分のボーダーを越える</a:t>
+              <a:t>クロスボーダーで関わりたい部署</a:t>
             </a:r>
             <a:endParaRPr lang="en-US" sz="2600" dirty="0"/>
           </a:p>
@@ -6026,18 +6115,57 @@
       </p:sp>
       <p:sp>
         <p:nvSpPr>
-          <p:cNvPr id="11" name="Shape 9"/>
-          <p:cNvSpPr/>
-          <p:nvPr/>
-        </p:nvSpPr>
-        <p:spPr>
-          <a:xfrm>
-            <a:off x="457200" y="1463040"/>
-            <a:ext cx="2560320" cy="685800"/>
+          <p:cNvPr id="11" name="Text 9"/>
+          <p:cNvSpPr txBox="1"/>
+          <p:nvPr/>
+        </p:nvSpPr>
+        <p:spPr>
+          <a:xfrm>
+            <a:off x="457200" y="1188720"/>
+            <a:ext cx="8229600" cy="320040"/>
+          </a:xfrm>
+          <a:prstGeom prst="rect">
+            <a:avLst/>
+          </a:prstGeom>
+          <a:noFill/>
+          <a:ln/>
+        </p:spPr>
+        <p:txBody>
+          <a:bodyPr wrap="square" lIns="0" tIns="0" rIns="0" bIns="0" rtlCol="0" anchor="t"/>
+          <a:lstStyle/>
+          <a:p>
+            <a:pPr indent="0" marL="0">
+              <a:buNone/>
+            </a:pPr>
+            <a:r>
+              <a:rPr lang="en-US" sz="1300" dirty="0">
+                <a:solidFill>
+                  <a:srgbClr val="6B7280"/>
+                </a:solidFill>
+                <a:latin typeface="Meiryo UI" pitchFamily="34" charset="0"/>
+                <a:ea typeface="Meiryo UI" pitchFamily="34" charset="-122"/>
+                <a:cs typeface="Meiryo UI" pitchFamily="34" charset="-120"/>
+              </a:rPr>
+              <a:t>愛媛などで福祉施設を広げるための「知識」と「動き方」を身につける</a:t>
+            </a:r>
+            <a:endParaRPr lang="en-US" sz="1300" dirty="0"/>
+          </a:p>
+        </p:txBody>
+      </p:sp>
+      <p:sp>
+        <p:nvSpPr>
+          <p:cNvPr id="12" name="Shape 10"/>
+          <p:cNvSpPr/>
+          <p:nvPr/>
+        </p:nvSpPr>
+        <p:spPr>
+          <a:xfrm>
+            <a:off x="457200" y="1691640"/>
+            <a:ext cx="4023360" cy="2514600"/>
           </a:xfrm>
           <a:prstGeom prst="roundRect">
             <a:avLst>
-              <a:gd name="adj" fmla="val 16000"/>
+              <a:gd name="adj" fmla="val 4364"/>
             </a:avLst>
           </a:prstGeom>
           <a:solidFill>
@@ -6053,39 +6181,78 @@
       </p:sp>
       <p:sp>
         <p:nvSpPr>
-          <p:cNvPr id="12" name="Shape 10"/>
-          <p:cNvSpPr/>
-          <p:nvPr/>
-        </p:nvSpPr>
-        <p:spPr>
-          <a:xfrm>
-            <a:off x="640080" y="1700784"/>
-            <a:ext cx="210312" cy="210312"/>
+          <p:cNvPr id="13" name="Text 11"/>
+          <p:cNvSpPr txBox="1"/>
+          <p:nvPr/>
+        </p:nvSpPr>
+        <p:spPr>
+          <a:xfrm>
+            <a:off x="685800" y="1874520"/>
+            <a:ext cx="3566160" cy="274320"/>
+          </a:xfrm>
+          <a:prstGeom prst="rect">
+            <a:avLst/>
+          </a:prstGeom>
+          <a:noFill/>
+          <a:ln/>
+        </p:spPr>
+        <p:txBody>
+          <a:bodyPr wrap="square" lIns="0" tIns="0" rIns="0" bIns="0" rtlCol="0" anchor="t"/>
+          <a:lstStyle/>
+          <a:p>
+            <a:pPr indent="0" marL="0">
+              <a:buNone/>
+            </a:pPr>
+            <a:r>
+              <a:rPr lang="en-US" sz="1100" dirty="0">
+                <a:solidFill>
+                  <a:srgbClr val="6B7280"/>
+                </a:solidFill>
+                <a:latin typeface="Meiryo UI" pitchFamily="34" charset="0"/>
+                <a:ea typeface="Meiryo UI" pitchFamily="34" charset="-122"/>
+                <a:cs typeface="Meiryo UI" pitchFamily="34" charset="-120"/>
+              </a:rPr>
+              <a:t>第三管理部　事業開発課</a:t>
+            </a:r>
+            <a:endParaRPr lang="en-US" sz="1100" dirty="0"/>
+          </a:p>
+        </p:txBody>
+      </p:sp>
+      <p:sp>
+        <p:nvSpPr>
+          <p:cNvPr id="14" name="Shape 12"/>
+          <p:cNvSpPr/>
+          <p:nvPr/>
+        </p:nvSpPr>
+        <p:spPr>
+          <a:xfrm>
+            <a:off x="685800" y="2240280"/>
+            <a:ext cx="201168" cy="201168"/>
           </a:xfrm>
           <a:prstGeom prst="ellipse">
             <a:avLst/>
           </a:prstGeom>
           <a:solidFill>
-            <a:srgbClr val="E8505B"/>
-          </a:solidFill>
-          <a:ln w="12700">
-            <a:solidFill>
-              <a:srgbClr val="E8505B"/>
-            </a:solidFill>
-            <a:prstDash val="solid"/>
-          </a:ln>
-        </p:spPr>
-      </p:sp>
-      <p:sp>
-        <p:nvSpPr>
-          <p:cNvPr id="13" name="Text 11"/>
-          <p:cNvSpPr txBox="1"/>
-          <p:nvPr/>
-        </p:nvSpPr>
-        <p:spPr>
-          <a:xfrm>
-            <a:off x="932688" y="1463040"/>
-            <a:ext cx="2057400" cy="685800"/>
+            <a:srgbClr val="5DBB63"/>
+          </a:solidFill>
+          <a:ln w="12700">
+            <a:solidFill>
+              <a:srgbClr val="5DBB63"/>
+            </a:solidFill>
+            <a:prstDash val="solid"/>
+          </a:ln>
+        </p:spPr>
+      </p:sp>
+      <p:sp>
+        <p:nvSpPr>
+          <p:cNvPr id="15" name="Text 13"/>
+          <p:cNvSpPr txBox="1"/>
+          <p:nvPr/>
+        </p:nvSpPr>
+        <p:spPr>
+          <a:xfrm>
+            <a:off x="978408" y="2148840"/>
+            <a:ext cx="3291840" cy="384048"/>
           </a:xfrm>
           <a:prstGeom prst="rect">
             <a:avLst/>
@@ -6101,7 +6268,7 @@
               <a:buNone/>
             </a:pPr>
             <a:r>
-              <a:rPr lang="en-US" sz="1250" b="1" dirty="0">
+              <a:rPr lang="en-US" sz="1800" b="1" dirty="0">
                 <a:solidFill>
                   <a:srgbClr val="2E3440"/>
                 </a:solidFill>
@@ -6109,477 +6276,22 @@
                 <a:ea typeface="Meiryo UI" pitchFamily="34" charset="-122"/>
                 <a:cs typeface="Meiryo UI" pitchFamily="34" charset="-120"/>
               </a:rPr>
-              <a:t>第三管理部</a:t>
-            </a:r>
-            <a:endParaRPr lang="en-US" sz="1250" dirty="0"/>
-          </a:p>
-        </p:txBody>
-      </p:sp>
-      <p:sp>
-        <p:nvSpPr>
-          <p:cNvPr id="14" name="Shape 12"/>
-          <p:cNvSpPr/>
-          <p:nvPr/>
-        </p:nvSpPr>
-        <p:spPr>
-          <a:xfrm>
-            <a:off x="3291840" y="1463040"/>
-            <a:ext cx="2560320" cy="685800"/>
-          </a:xfrm>
-          <a:prstGeom prst="roundRect">
-            <a:avLst>
-              <a:gd name="adj" fmla="val 16000"/>
-            </a:avLst>
-          </a:prstGeom>
-          <a:solidFill>
-            <a:srgbClr val="F4F6FA"/>
-          </a:solidFill>
-          <a:ln w="12700">
-            <a:solidFill>
-              <a:srgbClr val="F4F6FA"/>
-            </a:solidFill>
-            <a:prstDash val="solid"/>
-          </a:ln>
-        </p:spPr>
-      </p:sp>
-      <p:sp>
-        <p:nvSpPr>
-          <p:cNvPr id="15" name="Shape 13"/>
-          <p:cNvSpPr/>
-          <p:nvPr/>
-        </p:nvSpPr>
-        <p:spPr>
-          <a:xfrm>
-            <a:off x="3474720" y="1700784"/>
-            <a:ext cx="210312" cy="210312"/>
-          </a:xfrm>
-          <a:prstGeom prst="ellipse">
-            <a:avLst/>
-          </a:prstGeom>
-          <a:solidFill>
-            <a:srgbClr val="F39C33"/>
-          </a:solidFill>
-          <a:ln w="12700">
-            <a:solidFill>
-              <a:srgbClr val="F39C33"/>
-            </a:solidFill>
-            <a:prstDash val="solid"/>
-          </a:ln>
-        </p:spPr>
-      </p:sp>
-      <p:sp>
-        <p:nvSpPr>
-          <p:cNvPr id="16" name="Text 14"/>
-          <p:cNvSpPr txBox="1"/>
-          <p:nvPr/>
-        </p:nvSpPr>
-        <p:spPr>
-          <a:xfrm>
-            <a:off x="3767328" y="1463040"/>
-            <a:ext cx="2057400" cy="685800"/>
-          </a:xfrm>
-          <a:prstGeom prst="rect">
-            <a:avLst/>
-          </a:prstGeom>
-          <a:noFill/>
-          <a:ln/>
-        </p:spPr>
-        <p:txBody>
-          <a:bodyPr wrap="square" lIns="0" tIns="0" rIns="0" bIns="0" rtlCol="0" anchor="ctr"/>
-          <a:lstStyle/>
-          <a:p>
-            <a:pPr indent="0" marL="0">
-              <a:buNone/>
-            </a:pPr>
-            <a:r>
-              <a:rPr lang="en-US" sz="1250" b="1" dirty="0">
-                <a:solidFill>
-                  <a:srgbClr val="2E3440"/>
-                </a:solidFill>
-                <a:latin typeface="Meiryo UI" pitchFamily="34" charset="0"/>
-                <a:ea typeface="Meiryo UI" pitchFamily="34" charset="-122"/>
-                <a:cs typeface="Meiryo UI" pitchFamily="34" charset="-120"/>
-              </a:rPr>
-              <a:t>地域共創課</a:t>
-            </a:r>
-            <a:endParaRPr lang="en-US" sz="1250" dirty="0"/>
-          </a:p>
-        </p:txBody>
-      </p:sp>
-      <p:sp>
-        <p:nvSpPr>
-          <p:cNvPr id="17" name="Shape 15"/>
-          <p:cNvSpPr/>
-          <p:nvPr/>
-        </p:nvSpPr>
-        <p:spPr>
-          <a:xfrm>
-            <a:off x="6126480" y="1463040"/>
-            <a:ext cx="2560320" cy="685800"/>
-          </a:xfrm>
-          <a:prstGeom prst="roundRect">
-            <a:avLst>
-              <a:gd name="adj" fmla="val 16000"/>
-            </a:avLst>
-          </a:prstGeom>
-          <a:solidFill>
-            <a:srgbClr val="F4F6FA"/>
-          </a:solidFill>
-          <a:ln w="12700">
-            <a:solidFill>
-              <a:srgbClr val="F4F6FA"/>
-            </a:solidFill>
-            <a:prstDash val="solid"/>
-          </a:ln>
-        </p:spPr>
-      </p:sp>
-      <p:sp>
-        <p:nvSpPr>
-          <p:cNvPr id="18" name="Shape 16"/>
-          <p:cNvSpPr/>
-          <p:nvPr/>
-        </p:nvSpPr>
-        <p:spPr>
-          <a:xfrm>
-            <a:off x="6309360" y="1700784"/>
-            <a:ext cx="210312" cy="210312"/>
-          </a:xfrm>
-          <a:prstGeom prst="ellipse">
-            <a:avLst/>
-          </a:prstGeom>
-          <a:solidFill>
-            <a:srgbClr val="F2C230"/>
-          </a:solidFill>
-          <a:ln w="12700">
-            <a:solidFill>
-              <a:srgbClr val="F2C230"/>
-            </a:solidFill>
-            <a:prstDash val="solid"/>
-          </a:ln>
-        </p:spPr>
-      </p:sp>
-      <p:sp>
-        <p:nvSpPr>
-          <p:cNvPr id="19" name="Text 17"/>
-          <p:cNvSpPr txBox="1"/>
-          <p:nvPr/>
-        </p:nvSpPr>
-        <p:spPr>
-          <a:xfrm>
-            <a:off x="6601968" y="1463040"/>
-            <a:ext cx="2057400" cy="685800"/>
-          </a:xfrm>
-          <a:prstGeom prst="rect">
-            <a:avLst/>
-          </a:prstGeom>
-          <a:noFill/>
-          <a:ln/>
-        </p:spPr>
-        <p:txBody>
-          <a:bodyPr wrap="square" lIns="0" tIns="0" rIns="0" bIns="0" rtlCol="0" anchor="ctr"/>
-          <a:lstStyle/>
-          <a:p>
-            <a:pPr indent="0" marL="0">
-              <a:buNone/>
-            </a:pPr>
-            <a:r>
-              <a:rPr lang="en-US" sz="1250" b="1" dirty="0">
-                <a:solidFill>
-                  <a:srgbClr val="2E3440"/>
-                </a:solidFill>
-                <a:latin typeface="Meiryo UI" pitchFamily="34" charset="0"/>
-                <a:ea typeface="Meiryo UI" pitchFamily="34" charset="-122"/>
-                <a:cs typeface="Meiryo UI" pitchFamily="34" charset="-120"/>
-              </a:rPr>
-              <a:t>ソーシャルカレッジリッツ</a:t>
-            </a:r>
-            <a:endParaRPr lang="en-US" sz="1250" dirty="0"/>
-          </a:p>
-        </p:txBody>
-      </p:sp>
-      <p:sp>
-        <p:nvSpPr>
-          <p:cNvPr id="20" name="Shape 18"/>
-          <p:cNvSpPr/>
-          <p:nvPr/>
-        </p:nvSpPr>
-        <p:spPr>
-          <a:xfrm>
-            <a:off x="457200" y="3703320"/>
-            <a:ext cx="2560320" cy="685800"/>
-          </a:xfrm>
-          <a:prstGeom prst="roundRect">
-            <a:avLst>
-              <a:gd name="adj" fmla="val 16000"/>
-            </a:avLst>
-          </a:prstGeom>
-          <a:solidFill>
-            <a:srgbClr val="F4F6FA"/>
-          </a:solidFill>
-          <a:ln w="12700">
-            <a:solidFill>
-              <a:srgbClr val="F4F6FA"/>
-            </a:solidFill>
-            <a:prstDash val="solid"/>
-          </a:ln>
-        </p:spPr>
-      </p:sp>
-      <p:sp>
-        <p:nvSpPr>
-          <p:cNvPr id="21" name="Shape 19"/>
-          <p:cNvSpPr/>
-          <p:nvPr/>
-        </p:nvSpPr>
-        <p:spPr>
-          <a:xfrm>
-            <a:off x="640080" y="3941064"/>
-            <a:ext cx="210312" cy="210312"/>
-          </a:xfrm>
-          <a:prstGeom prst="ellipse">
-            <a:avLst/>
-          </a:prstGeom>
-          <a:solidFill>
-            <a:srgbClr val="5DBB63"/>
-          </a:solidFill>
-          <a:ln w="12700">
-            <a:solidFill>
-              <a:srgbClr val="5DBB63"/>
-            </a:solidFill>
-            <a:prstDash val="solid"/>
-          </a:ln>
-        </p:spPr>
-      </p:sp>
-      <p:sp>
-        <p:nvSpPr>
-          <p:cNvPr id="22" name="Text 20"/>
-          <p:cNvSpPr txBox="1"/>
-          <p:nvPr/>
-        </p:nvSpPr>
-        <p:spPr>
-          <a:xfrm>
-            <a:off x="932688" y="3703320"/>
-            <a:ext cx="2057400" cy="685800"/>
-          </a:xfrm>
-          <a:prstGeom prst="rect">
-            <a:avLst/>
-          </a:prstGeom>
-          <a:noFill/>
-          <a:ln/>
-        </p:spPr>
-        <p:txBody>
-          <a:bodyPr wrap="square" lIns="0" tIns="0" rIns="0" bIns="0" rtlCol="0" anchor="ctr"/>
-          <a:lstStyle/>
-          <a:p>
-            <a:pPr indent="0" marL="0">
-              <a:buNone/>
-            </a:pPr>
-            <a:r>
-              <a:rPr lang="en-US" sz="1250" b="1" dirty="0">
-                <a:solidFill>
-                  <a:srgbClr val="2E3440"/>
-                </a:solidFill>
-                <a:latin typeface="Meiryo UI" pitchFamily="34" charset="0"/>
-                <a:ea typeface="Meiryo UI" pitchFamily="34" charset="-122"/>
-                <a:cs typeface="Meiryo UI" pitchFamily="34" charset="-120"/>
-              </a:rPr>
-              <a:t>ラトリエトゥボナペティ</a:t>
-            </a:r>
-            <a:endParaRPr lang="en-US" sz="1250" dirty="0"/>
-          </a:p>
-        </p:txBody>
-      </p:sp>
-      <p:sp>
-        <p:nvSpPr>
-          <p:cNvPr id="23" name="Shape 21"/>
-          <p:cNvSpPr/>
-          <p:nvPr/>
-        </p:nvSpPr>
-        <p:spPr>
-          <a:xfrm>
-            <a:off x="3291840" y="3703320"/>
-            <a:ext cx="2560320" cy="685800"/>
-          </a:xfrm>
-          <a:prstGeom prst="roundRect">
-            <a:avLst>
-              <a:gd name="adj" fmla="val 16000"/>
-            </a:avLst>
-          </a:prstGeom>
-          <a:solidFill>
-            <a:srgbClr val="F4F6FA"/>
-          </a:solidFill>
-          <a:ln w="12700">
-            <a:solidFill>
-              <a:srgbClr val="F4F6FA"/>
-            </a:solidFill>
-            <a:prstDash val="solid"/>
-          </a:ln>
-        </p:spPr>
-      </p:sp>
-      <p:sp>
-        <p:nvSpPr>
-          <p:cNvPr id="24" name="Shape 22"/>
-          <p:cNvSpPr/>
-          <p:nvPr/>
-        </p:nvSpPr>
-        <p:spPr>
-          <a:xfrm>
-            <a:off x="3474720" y="3941064"/>
-            <a:ext cx="210312" cy="210312"/>
-          </a:xfrm>
-          <a:prstGeom prst="ellipse">
-            <a:avLst/>
-          </a:prstGeom>
-          <a:solidFill>
-            <a:srgbClr val="3FA7D6"/>
-          </a:solidFill>
-          <a:ln w="12700">
-            <a:solidFill>
-              <a:srgbClr val="3FA7D6"/>
-            </a:solidFill>
-            <a:prstDash val="solid"/>
-          </a:ln>
-        </p:spPr>
-      </p:sp>
-      <p:sp>
-        <p:nvSpPr>
-          <p:cNvPr id="25" name="Text 23"/>
-          <p:cNvSpPr txBox="1"/>
-          <p:nvPr/>
-        </p:nvSpPr>
-        <p:spPr>
-          <a:xfrm>
-            <a:off x="3767328" y="3703320"/>
-            <a:ext cx="2057400" cy="685800"/>
-          </a:xfrm>
-          <a:prstGeom prst="rect">
-            <a:avLst/>
-          </a:prstGeom>
-          <a:noFill/>
-          <a:ln/>
-        </p:spPr>
-        <p:txBody>
-          <a:bodyPr wrap="square" lIns="0" tIns="0" rIns="0" bIns="0" rtlCol="0" anchor="ctr"/>
-          <a:lstStyle/>
-          <a:p>
-            <a:pPr indent="0" marL="0">
-              <a:buNone/>
-            </a:pPr>
-            <a:r>
-              <a:rPr lang="en-US" sz="1250" b="1" dirty="0">
-                <a:solidFill>
-                  <a:srgbClr val="2E3440"/>
-                </a:solidFill>
-                <a:latin typeface="Meiryo UI" pitchFamily="34" charset="0"/>
-                <a:ea typeface="Meiryo UI" pitchFamily="34" charset="-122"/>
-                <a:cs typeface="Meiryo UI" pitchFamily="34" charset="-120"/>
-              </a:rPr>
-              <a:t>生活介護</a:t>
-            </a:r>
-            <a:endParaRPr lang="en-US" sz="1250" dirty="0"/>
-          </a:p>
-        </p:txBody>
-      </p:sp>
-      <p:sp>
-        <p:nvSpPr>
-          <p:cNvPr id="26" name="Shape 24"/>
-          <p:cNvSpPr/>
-          <p:nvPr/>
-        </p:nvSpPr>
-        <p:spPr>
-          <a:xfrm>
-            <a:off x="6126480" y="3703320"/>
-            <a:ext cx="2560320" cy="685800"/>
-          </a:xfrm>
-          <a:prstGeom prst="roundRect">
-            <a:avLst>
-              <a:gd name="adj" fmla="val 16000"/>
-            </a:avLst>
-          </a:prstGeom>
-          <a:solidFill>
-            <a:srgbClr val="F4F6FA"/>
-          </a:solidFill>
-          <a:ln w="12700">
-            <a:solidFill>
-              <a:srgbClr val="F4F6FA"/>
-            </a:solidFill>
-            <a:prstDash val="solid"/>
-          </a:ln>
-        </p:spPr>
-      </p:sp>
-      <p:sp>
-        <p:nvSpPr>
-          <p:cNvPr id="27" name="Shape 25"/>
-          <p:cNvSpPr/>
-          <p:nvPr/>
-        </p:nvSpPr>
-        <p:spPr>
-          <a:xfrm>
-            <a:off x="6309360" y="3941064"/>
-            <a:ext cx="210312" cy="210312"/>
-          </a:xfrm>
-          <a:prstGeom prst="ellipse">
-            <a:avLst/>
-          </a:prstGeom>
-          <a:solidFill>
-            <a:srgbClr val="4A6FC7"/>
-          </a:solidFill>
-          <a:ln w="12700">
-            <a:solidFill>
-              <a:srgbClr val="4A6FC7"/>
-            </a:solidFill>
-            <a:prstDash val="solid"/>
-          </a:ln>
-        </p:spPr>
-      </p:sp>
-      <p:sp>
-        <p:nvSpPr>
-          <p:cNvPr id="28" name="Text 26"/>
-          <p:cNvSpPr txBox="1"/>
-          <p:nvPr/>
-        </p:nvSpPr>
-        <p:spPr>
-          <a:xfrm>
-            <a:off x="6601968" y="3703320"/>
-            <a:ext cx="2057400" cy="685800"/>
-          </a:xfrm>
-          <a:prstGeom prst="rect">
-            <a:avLst/>
-          </a:prstGeom>
-          <a:noFill/>
-          <a:ln/>
-        </p:spPr>
-        <p:txBody>
-          <a:bodyPr wrap="square" lIns="0" tIns="0" rIns="0" bIns="0" rtlCol="0" anchor="ctr"/>
-          <a:lstStyle/>
-          <a:p>
-            <a:pPr indent="0" marL="0">
-              <a:buNone/>
-            </a:pPr>
-            <a:r>
-              <a:rPr lang="en-US" sz="1250" b="1" dirty="0">
-                <a:solidFill>
-                  <a:srgbClr val="2E3440"/>
-                </a:solidFill>
-                <a:latin typeface="Meiryo UI" pitchFamily="34" charset="0"/>
-                <a:ea typeface="Meiryo UI" pitchFamily="34" charset="-122"/>
-                <a:cs typeface="Meiryo UI" pitchFamily="34" charset="-120"/>
-              </a:rPr>
-              <a:t>相談支援</a:t>
-            </a:r>
-            <a:endParaRPr lang="en-US" sz="1250" dirty="0"/>
-          </a:p>
-        </p:txBody>
-      </p:sp>
-      <p:sp>
-        <p:nvSpPr>
-          <p:cNvPr id="29" name="Shape 27"/>
-          <p:cNvSpPr/>
-          <p:nvPr/>
-        </p:nvSpPr>
-        <p:spPr>
-          <a:xfrm>
-            <a:off x="1371600" y="2487168"/>
-            <a:ext cx="6400800" cy="914400"/>
+              <a:t>地域共創係</a:t>
+            </a:r>
+            <a:endParaRPr lang="en-US" sz="1800" dirty="0"/>
+          </a:p>
+        </p:txBody>
+      </p:sp>
+      <p:sp>
+        <p:nvSpPr>
+          <p:cNvPr id="16" name="Shape 14"/>
+          <p:cNvSpPr/>
+          <p:nvPr/>
+        </p:nvSpPr>
+        <p:spPr>
+          <a:xfrm>
+            <a:off x="685800" y="2697480"/>
+            <a:ext cx="685800" cy="274320"/>
           </a:xfrm>
           <a:prstGeom prst="roundRect">
             <a:avLst>
@@ -6587,11 +6299,465 @@
             </a:avLst>
           </a:prstGeom>
           <a:solidFill>
-            <a:srgbClr val="4A6FC7"/>
-          </a:solidFill>
-          <a:ln w="12700">
-            <a:solidFill>
-              <a:srgbClr val="4A6FC7"/>
+            <a:srgbClr val="5DBB63"/>
+          </a:solidFill>
+          <a:ln w="12700">
+            <a:solidFill>
+              <a:srgbClr val="5DBB63"/>
+            </a:solidFill>
+            <a:prstDash val="solid"/>
+          </a:ln>
+        </p:spPr>
+      </p:sp>
+      <p:sp>
+        <p:nvSpPr>
+          <p:cNvPr id="17" name="Text 15"/>
+          <p:cNvSpPr txBox="1"/>
+          <p:nvPr/>
+        </p:nvSpPr>
+        <p:spPr>
+          <a:xfrm>
+            <a:off x="685800" y="2697480"/>
+            <a:ext cx="685800" cy="274320"/>
+          </a:xfrm>
+          <a:prstGeom prst="rect">
+            <a:avLst/>
+          </a:prstGeom>
+          <a:noFill/>
+          <a:ln/>
+        </p:spPr>
+        <p:txBody>
+          <a:bodyPr wrap="square" lIns="0" tIns="0" rIns="0" bIns="0" rtlCol="0" anchor="ctr"/>
+          <a:lstStyle/>
+          <a:p>
+            <a:pPr algn="ctr" indent="0" marL="0">
+              <a:buNone/>
+            </a:pPr>
+            <a:r>
+              <a:rPr lang="en-US" sz="1000" b="1" dirty="0">
+                <a:solidFill>
+                  <a:srgbClr val="FFFFFF"/>
+                </a:solidFill>
+                <a:latin typeface="Meiryo UI" pitchFamily="34" charset="0"/>
+                <a:ea typeface="Meiryo UI" pitchFamily="34" charset="-122"/>
+                <a:cs typeface="Meiryo UI" pitchFamily="34" charset="-120"/>
+              </a:rPr>
+              <a:t>知識</a:t>
+            </a:r>
+            <a:endParaRPr lang="en-US" sz="1000" dirty="0"/>
+          </a:p>
+        </p:txBody>
+      </p:sp>
+      <p:sp>
+        <p:nvSpPr>
+          <p:cNvPr id="18" name="Text 16"/>
+          <p:cNvSpPr txBox="1"/>
+          <p:nvPr/>
+        </p:nvSpPr>
+        <p:spPr>
+          <a:xfrm>
+            <a:off x="1508760" y="2670048"/>
+            <a:ext cx="2788920" cy="640080"/>
+          </a:xfrm>
+          <a:prstGeom prst="rect">
+            <a:avLst/>
+          </a:prstGeom>
+          <a:noFill/>
+          <a:ln/>
+        </p:spPr>
+        <p:txBody>
+          <a:bodyPr wrap="square" lIns="0" tIns="0" rIns="0" bIns="0" rtlCol="0" anchor="t"/>
+          <a:lstStyle/>
+          <a:p>
+            <a:pPr indent="0" marL="0">
+              <a:lnSpc>
+                <a:spcPct val="110000"/>
+              </a:lnSpc>
+              <a:buNone/>
+            </a:pPr>
+            <a:r>
+              <a:rPr lang="en-US" sz="1150" dirty="0">
+                <a:solidFill>
+                  <a:srgbClr val="2E3440"/>
+                </a:solidFill>
+                <a:latin typeface="Meiryo UI" pitchFamily="34" charset="0"/>
+                <a:ea typeface="Meiryo UI" pitchFamily="34" charset="-122"/>
+                <a:cs typeface="Meiryo UI" pitchFamily="34" charset="-120"/>
+              </a:rPr>
+              <a:t>新規事業の立ち上げ方（市場調査・事業計画・収支の見立て・指定申請）</a:t>
+            </a:r>
+            <a:endParaRPr lang="en-US" sz="1150" dirty="0"/>
+          </a:p>
+        </p:txBody>
+      </p:sp>
+      <p:sp>
+        <p:nvSpPr>
+          <p:cNvPr id="19" name="Shape 17"/>
+          <p:cNvSpPr/>
+          <p:nvPr/>
+        </p:nvSpPr>
+        <p:spPr>
+          <a:xfrm>
+            <a:off x="685800" y="3410712"/>
+            <a:ext cx="685800" cy="274320"/>
+          </a:xfrm>
+          <a:prstGeom prst="roundRect">
+            <a:avLst>
+              <a:gd name="adj" fmla="val 50000"/>
+            </a:avLst>
+          </a:prstGeom>
+          <a:solidFill>
+            <a:srgbClr val="5DBB63"/>
+          </a:solidFill>
+          <a:ln w="12700">
+            <a:solidFill>
+              <a:srgbClr val="5DBB63"/>
+            </a:solidFill>
+            <a:prstDash val="solid"/>
+          </a:ln>
+        </p:spPr>
+      </p:sp>
+      <p:sp>
+        <p:nvSpPr>
+          <p:cNvPr id="20" name="Text 18"/>
+          <p:cNvSpPr txBox="1"/>
+          <p:nvPr/>
+        </p:nvSpPr>
+        <p:spPr>
+          <a:xfrm>
+            <a:off x="685800" y="3410712"/>
+            <a:ext cx="685800" cy="274320"/>
+          </a:xfrm>
+          <a:prstGeom prst="rect">
+            <a:avLst/>
+          </a:prstGeom>
+          <a:noFill/>
+          <a:ln/>
+        </p:spPr>
+        <p:txBody>
+          <a:bodyPr wrap="square" lIns="0" tIns="0" rIns="0" bIns="0" rtlCol="0" anchor="ctr"/>
+          <a:lstStyle/>
+          <a:p>
+            <a:pPr algn="ctr" indent="0" marL="0">
+              <a:buNone/>
+            </a:pPr>
+            <a:r>
+              <a:rPr lang="en-US" sz="1000" b="1" dirty="0">
+                <a:solidFill>
+                  <a:srgbClr val="FFFFFF"/>
+                </a:solidFill>
+                <a:latin typeface="Meiryo UI" pitchFamily="34" charset="0"/>
+                <a:ea typeface="Meiryo UI" pitchFamily="34" charset="-122"/>
+                <a:cs typeface="Meiryo UI" pitchFamily="34" charset="-120"/>
+              </a:rPr>
+              <a:t>動き方</a:t>
+            </a:r>
+            <a:endParaRPr lang="en-US" sz="1000" dirty="0"/>
+          </a:p>
+        </p:txBody>
+      </p:sp>
+      <p:sp>
+        <p:nvSpPr>
+          <p:cNvPr id="21" name="Text 19"/>
+          <p:cNvSpPr txBox="1"/>
+          <p:nvPr/>
+        </p:nvSpPr>
+        <p:spPr>
+          <a:xfrm>
+            <a:off x="1508760" y="3383280"/>
+            <a:ext cx="2788920" cy="640080"/>
+          </a:xfrm>
+          <a:prstGeom prst="rect">
+            <a:avLst/>
+          </a:prstGeom>
+          <a:noFill/>
+          <a:ln/>
+        </p:spPr>
+        <p:txBody>
+          <a:bodyPr wrap="square" lIns="0" tIns="0" rIns="0" bIns="0" rtlCol="0" anchor="t"/>
+          <a:lstStyle/>
+          <a:p>
+            <a:pPr indent="0" marL="0">
+              <a:lnSpc>
+                <a:spcPct val="110000"/>
+              </a:lnSpc>
+              <a:buNone/>
+            </a:pPr>
+            <a:r>
+              <a:rPr lang="en-US" sz="1150" dirty="0">
+                <a:solidFill>
+                  <a:srgbClr val="2E3440"/>
+                </a:solidFill>
+                <a:latin typeface="Meiryo UI" pitchFamily="34" charset="0"/>
+                <a:ea typeface="Meiryo UI" pitchFamily="34" charset="-122"/>
+                <a:cs typeface="Meiryo UI" pitchFamily="34" charset="-120"/>
+              </a:rPr>
+              <a:t>自治体・地域企業・学校と関係を築き、地域に根差した事業をつくる</a:t>
+            </a:r>
+            <a:endParaRPr lang="en-US" sz="1150" dirty="0"/>
+          </a:p>
+        </p:txBody>
+      </p:sp>
+      <p:sp>
+        <p:nvSpPr>
+          <p:cNvPr id="22" name="Shape 20"/>
+          <p:cNvSpPr/>
+          <p:nvPr/>
+        </p:nvSpPr>
+        <p:spPr>
+          <a:xfrm>
+            <a:off x="4663440" y="1691640"/>
+            <a:ext cx="4023360" cy="2514600"/>
+          </a:xfrm>
+          <a:prstGeom prst="roundRect">
+            <a:avLst>
+              <a:gd name="adj" fmla="val 4364"/>
+            </a:avLst>
+          </a:prstGeom>
+          <a:solidFill>
+            <a:srgbClr val="F4F6FA"/>
+          </a:solidFill>
+          <a:ln w="12700">
+            <a:solidFill>
+              <a:srgbClr val="F4F6FA"/>
+            </a:solidFill>
+            <a:prstDash val="solid"/>
+          </a:ln>
+        </p:spPr>
+      </p:sp>
+      <p:sp>
+        <p:nvSpPr>
+          <p:cNvPr id="23" name="Text 21"/>
+          <p:cNvSpPr txBox="1"/>
+          <p:nvPr/>
+        </p:nvSpPr>
+        <p:spPr>
+          <a:xfrm>
+            <a:off x="4892040" y="1874520"/>
+            <a:ext cx="3566160" cy="274320"/>
+          </a:xfrm>
+          <a:prstGeom prst="rect">
+            <a:avLst/>
+          </a:prstGeom>
+          <a:noFill/>
+          <a:ln/>
+        </p:spPr>
+        <p:txBody>
+          <a:bodyPr wrap="square" lIns="0" tIns="0" rIns="0" bIns="0" rtlCol="0" anchor="t"/>
+          <a:lstStyle/>
+          <a:p>
+            <a:pPr indent="0" marL="0">
+              <a:buNone/>
+            </a:pPr>
+            <a:r>
+              <a:rPr lang="en-US" sz="1100" dirty="0">
+                <a:solidFill>
+                  <a:srgbClr val="6B7280"/>
+                </a:solidFill>
+                <a:latin typeface="Meiryo UI" pitchFamily="34" charset="0"/>
+                <a:ea typeface="Meiryo UI" pitchFamily="34" charset="-122"/>
+                <a:cs typeface="Meiryo UI" pitchFamily="34" charset="-120"/>
+              </a:rPr>
+              <a:t>第三管理部　マーケティング課</a:t>
+            </a:r>
+            <a:endParaRPr lang="en-US" sz="1100" dirty="0"/>
+          </a:p>
+        </p:txBody>
+      </p:sp>
+      <p:sp>
+        <p:nvSpPr>
+          <p:cNvPr id="24" name="Shape 22"/>
+          <p:cNvSpPr/>
+          <p:nvPr/>
+        </p:nvSpPr>
+        <p:spPr>
+          <a:xfrm>
+            <a:off x="4892040" y="2240280"/>
+            <a:ext cx="201168" cy="201168"/>
+          </a:xfrm>
+          <a:prstGeom prst="ellipse">
+            <a:avLst/>
+          </a:prstGeom>
+          <a:solidFill>
+            <a:srgbClr val="3FA7D6"/>
+          </a:solidFill>
+          <a:ln w="12700">
+            <a:solidFill>
+              <a:srgbClr val="3FA7D6"/>
+            </a:solidFill>
+            <a:prstDash val="solid"/>
+          </a:ln>
+        </p:spPr>
+      </p:sp>
+      <p:sp>
+        <p:nvSpPr>
+          <p:cNvPr id="25" name="Text 23"/>
+          <p:cNvSpPr txBox="1"/>
+          <p:nvPr/>
+        </p:nvSpPr>
+        <p:spPr>
+          <a:xfrm>
+            <a:off x="5184648" y="2148840"/>
+            <a:ext cx="3291840" cy="384048"/>
+          </a:xfrm>
+          <a:prstGeom prst="rect">
+            <a:avLst/>
+          </a:prstGeom>
+          <a:noFill/>
+          <a:ln/>
+        </p:spPr>
+        <p:txBody>
+          <a:bodyPr wrap="square" lIns="0" tIns="0" rIns="0" bIns="0" rtlCol="0" anchor="ctr"/>
+          <a:lstStyle/>
+          <a:p>
+            <a:pPr indent="0" marL="0">
+              <a:buNone/>
+            </a:pPr>
+            <a:r>
+              <a:rPr lang="en-US" sz="1800" b="1" dirty="0">
+                <a:solidFill>
+                  <a:srgbClr val="2E3440"/>
+                </a:solidFill>
+                <a:latin typeface="Meiryo UI" pitchFamily="34" charset="0"/>
+                <a:ea typeface="Meiryo UI" pitchFamily="34" charset="-122"/>
+                <a:cs typeface="Meiryo UI" pitchFamily="34" charset="-120"/>
+              </a:rPr>
+              <a:t>トータルサポート推進係</a:t>
+            </a:r>
+            <a:endParaRPr lang="en-US" sz="1800" dirty="0"/>
+          </a:p>
+        </p:txBody>
+      </p:sp>
+      <p:sp>
+        <p:nvSpPr>
+          <p:cNvPr id="26" name="Shape 24"/>
+          <p:cNvSpPr/>
+          <p:nvPr/>
+        </p:nvSpPr>
+        <p:spPr>
+          <a:xfrm>
+            <a:off x="4892040" y="2697480"/>
+            <a:ext cx="685800" cy="274320"/>
+          </a:xfrm>
+          <a:prstGeom prst="roundRect">
+            <a:avLst>
+              <a:gd name="adj" fmla="val 50000"/>
+            </a:avLst>
+          </a:prstGeom>
+          <a:solidFill>
+            <a:srgbClr val="3FA7D6"/>
+          </a:solidFill>
+          <a:ln w="12700">
+            <a:solidFill>
+              <a:srgbClr val="3FA7D6"/>
+            </a:solidFill>
+            <a:prstDash val="solid"/>
+          </a:ln>
+        </p:spPr>
+      </p:sp>
+      <p:sp>
+        <p:nvSpPr>
+          <p:cNvPr id="27" name="Text 25"/>
+          <p:cNvSpPr txBox="1"/>
+          <p:nvPr/>
+        </p:nvSpPr>
+        <p:spPr>
+          <a:xfrm>
+            <a:off x="4892040" y="2697480"/>
+            <a:ext cx="685800" cy="274320"/>
+          </a:xfrm>
+          <a:prstGeom prst="rect">
+            <a:avLst/>
+          </a:prstGeom>
+          <a:noFill/>
+          <a:ln/>
+        </p:spPr>
+        <p:txBody>
+          <a:bodyPr wrap="square" lIns="0" tIns="0" rIns="0" bIns="0" rtlCol="0" anchor="ctr"/>
+          <a:lstStyle/>
+          <a:p>
+            <a:pPr algn="ctr" indent="0" marL="0">
+              <a:buNone/>
+            </a:pPr>
+            <a:r>
+              <a:rPr lang="en-US" sz="1000" b="1" dirty="0">
+                <a:solidFill>
+                  <a:srgbClr val="FFFFFF"/>
+                </a:solidFill>
+                <a:latin typeface="Meiryo UI" pitchFamily="34" charset="0"/>
+                <a:ea typeface="Meiryo UI" pitchFamily="34" charset="-122"/>
+                <a:cs typeface="Meiryo UI" pitchFamily="34" charset="-120"/>
+              </a:rPr>
+              <a:t>知識</a:t>
+            </a:r>
+            <a:endParaRPr lang="en-US" sz="1000" dirty="0"/>
+          </a:p>
+        </p:txBody>
+      </p:sp>
+      <p:sp>
+        <p:nvSpPr>
+          <p:cNvPr id="28" name="Text 26"/>
+          <p:cNvSpPr txBox="1"/>
+          <p:nvPr/>
+        </p:nvSpPr>
+        <p:spPr>
+          <a:xfrm>
+            <a:off x="5715000" y="2670048"/>
+            <a:ext cx="2788920" cy="640080"/>
+          </a:xfrm>
+          <a:prstGeom prst="rect">
+            <a:avLst/>
+          </a:prstGeom>
+          <a:noFill/>
+          <a:ln/>
+        </p:spPr>
+        <p:txBody>
+          <a:bodyPr wrap="square" lIns="0" tIns="0" rIns="0" bIns="0" rtlCol="0" anchor="t"/>
+          <a:lstStyle/>
+          <a:p>
+            <a:pPr indent="0" marL="0">
+              <a:lnSpc>
+                <a:spcPct val="110000"/>
+              </a:lnSpc>
+              <a:buNone/>
+            </a:pPr>
+            <a:r>
+              <a:rPr lang="en-US" sz="1150" dirty="0">
+                <a:solidFill>
+                  <a:srgbClr val="2E3440"/>
+                </a:solidFill>
+                <a:latin typeface="Meiryo UI" pitchFamily="34" charset="0"/>
+                <a:ea typeface="Meiryo UI" pitchFamily="34" charset="-122"/>
+                <a:cs typeface="Meiryo UI" pitchFamily="34" charset="-120"/>
+              </a:rPr>
+              <a:t>キャレオスのトータルサポートの全体像と、事業部どうしのつなぎ方</a:t>
+            </a:r>
+            <a:endParaRPr lang="en-US" sz="1150" dirty="0"/>
+          </a:p>
+        </p:txBody>
+      </p:sp>
+      <p:sp>
+        <p:nvSpPr>
+          <p:cNvPr id="29" name="Shape 27"/>
+          <p:cNvSpPr/>
+          <p:nvPr/>
+        </p:nvSpPr>
+        <p:spPr>
+          <a:xfrm>
+            <a:off x="4892040" y="3410712"/>
+            <a:ext cx="685800" cy="274320"/>
+          </a:xfrm>
+          <a:prstGeom prst="roundRect">
+            <a:avLst>
+              <a:gd name="adj" fmla="val 50000"/>
+            </a:avLst>
+          </a:prstGeom>
+          <a:solidFill>
+            <a:srgbClr val="3FA7D6"/>
+          </a:solidFill>
+          <a:ln w="12700">
+            <a:solidFill>
+              <a:srgbClr val="3FA7D6"/>
             </a:solidFill>
             <a:prstDash val="solid"/>
           </a:ln>
@@ -6605,24 +6771,24 @@
         </p:nvSpPr>
         <p:spPr>
           <a:xfrm>
-            <a:off x="1371600" y="2487168"/>
-            <a:ext cx="6400800" cy="502920"/>
-          </a:xfrm>
-          <a:prstGeom prst="rect">
-            <a:avLst/>
-          </a:prstGeom>
-          <a:noFill/>
-          <a:ln/>
-        </p:spPr>
-        <p:txBody>
-          <a:bodyPr wrap="square" lIns="0" tIns="0" rIns="0" bIns="0" rtlCol="0" anchor="b"/>
+            <a:off x="4892040" y="3410712"/>
+            <a:ext cx="685800" cy="274320"/>
+          </a:xfrm>
+          <a:prstGeom prst="rect">
+            <a:avLst/>
+          </a:prstGeom>
+          <a:noFill/>
+          <a:ln/>
+        </p:spPr>
+        <p:txBody>
+          <a:bodyPr wrap="square" lIns="0" tIns="0" rIns="0" bIns="0" rtlCol="0" anchor="ctr"/>
           <a:lstStyle/>
           <a:p>
             <a:pPr algn="ctr" indent="0" marL="0">
               <a:buNone/>
             </a:pPr>
             <a:r>
-              <a:rPr lang="en-US" sz="1800" b="1" dirty="0">
+              <a:rPr lang="en-US" sz="1000" b="1" dirty="0">
                 <a:solidFill>
                   <a:srgbClr val="FFFFFF"/>
                 </a:solidFill>
@@ -6630,9 +6796,9 @@
                 <a:ea typeface="Meiryo UI" pitchFamily="34" charset="-122"/>
                 <a:cs typeface="Meiryo UI" pitchFamily="34" charset="-120"/>
               </a:rPr>
-              <a:t>数多の事業部と連携し、学びを得る</a:t>
-            </a:r>
-            <a:endParaRPr lang="en-US" sz="1800" dirty="0"/>
+              <a:t>動き方</a:t>
+            </a:r>
+            <a:endParaRPr lang="en-US" sz="1000" dirty="0"/>
           </a:p>
         </p:txBody>
       </p:sp>
@@ -6644,8 +6810,8 @@
         </p:nvSpPr>
         <p:spPr>
           <a:xfrm>
-            <a:off x="1371600" y="3017520"/>
-            <a:ext cx="6400800" cy="365760"/>
+            <a:off x="5715000" y="3383280"/>
+            <a:ext cx="2788920" cy="640080"/>
           </a:xfrm>
           <a:prstGeom prst="rect">
             <a:avLst/>
@@ -6657,21 +6823,63 @@
           <a:bodyPr wrap="square" lIns="0" tIns="0" rIns="0" bIns="0" rtlCol="0" anchor="t"/>
           <a:lstStyle/>
           <a:p>
-            <a:pPr algn="ctr" indent="0" marL="0">
-              <a:buNone/>
-            </a:pPr>
-            <a:r>
-              <a:rPr lang="en-US" sz="1200" dirty="0">
-                <a:solidFill>
-                  <a:srgbClr val="FFFFFF"/>
-                </a:solidFill>
-                <a:latin typeface="Meiryo UI" pitchFamily="34" charset="0"/>
-                <a:ea typeface="Meiryo UI" pitchFamily="34" charset="-122"/>
-                <a:cs typeface="Meiryo UI" pitchFamily="34" charset="-120"/>
-              </a:rPr>
-              <a:t>放デイの枠を越え、ライフステージ全体を支える視点へ</a:t>
-            </a:r>
-            <a:endParaRPr lang="en-US" sz="1200" dirty="0"/>
+            <a:pPr indent="0" marL="0">
+              <a:lnSpc>
+                <a:spcPct val="110000"/>
+              </a:lnSpc>
+              <a:buNone/>
+            </a:pPr>
+            <a:r>
+              <a:rPr lang="en-US" sz="1150" dirty="0">
+                <a:solidFill>
+                  <a:srgbClr val="2E3440"/>
+                </a:solidFill>
+                <a:latin typeface="Meiryo UI" pitchFamily="34" charset="0"/>
+                <a:ea typeface="Meiryo UI" pitchFamily="34" charset="-122"/>
+                <a:cs typeface="Meiryo UI" pitchFamily="34" charset="-120"/>
+              </a:rPr>
+              <a:t>利用者・保護者の声から、放デイ → 就労へ切れ目なくつなぐ導線をつくる</a:t>
+            </a:r>
+            <a:endParaRPr lang="en-US" sz="1150" dirty="0"/>
+          </a:p>
+        </p:txBody>
+      </p:sp>
+      <p:sp>
+        <p:nvSpPr>
+          <p:cNvPr id="32" name="Text 30"/>
+          <p:cNvSpPr txBox="1"/>
+          <p:nvPr/>
+        </p:nvSpPr>
+        <p:spPr>
+          <a:xfrm>
+            <a:off x="457200" y="4370832"/>
+            <a:ext cx="8229600" cy="320040"/>
+          </a:xfrm>
+          <a:prstGeom prst="rect">
+            <a:avLst/>
+          </a:prstGeom>
+          <a:noFill/>
+          <a:ln/>
+        </p:spPr>
+        <p:txBody>
+          <a:bodyPr wrap="square" lIns="0" tIns="0" rIns="0" bIns="0" rtlCol="0" anchor="t"/>
+          <a:lstStyle/>
+          <a:p>
+            <a:pPr indent="0" marL="0">
+              <a:buNone/>
+            </a:pPr>
+            <a:r>
+              <a:rPr lang="en-US" sz="1500" b="1" dirty="0">
+                <a:solidFill>
+                  <a:srgbClr val="4A6FC7"/>
+                </a:solidFill>
+                <a:latin typeface="Meiryo UI" pitchFamily="34" charset="0"/>
+                <a:ea typeface="Meiryo UI" pitchFamily="34" charset="-122"/>
+                <a:cs typeface="Meiryo UI" pitchFamily="34" charset="-120"/>
+              </a:rPr>
+              <a:t>現場（愛媛）の声 × 本部の知識と動き方 ＝ 自分のボーダーを越える</a:t>
+            </a:r>
+            <a:endParaRPr lang="en-US" sz="1500" dirty="0"/>
           </a:p>
         </p:txBody>
       </p:sp>
@@ -6915,7 +7123,7 @@
                 <a:ea typeface="Meiryo UI" pitchFamily="34" charset="-122"/>
                 <a:cs typeface="Meiryo UI" pitchFamily="34" charset="-120"/>
               </a:rPr>
-              <a:t>描く未来　― 愛媛から全国へ（仮構想）</a:t>
+              <a:t>まずは、愛媛に就労継続支援B型を</a:t>
             </a:r>
             <a:endParaRPr lang="en-US" sz="2600" dirty="0"/>
           </a:p>
@@ -6962,18 +7170,57 @@
       </p:sp>
       <p:sp>
         <p:nvSpPr>
-          <p:cNvPr id="11" name="Shape 9"/>
-          <p:cNvSpPr/>
-          <p:nvPr/>
-        </p:nvSpPr>
-        <p:spPr>
-          <a:xfrm>
-            <a:off x="457200" y="1417320"/>
-            <a:ext cx="1920240" cy="2148840"/>
+          <p:cNvPr id="11" name="Text 9"/>
+          <p:cNvSpPr txBox="1"/>
+          <p:nvPr/>
+        </p:nvSpPr>
+        <p:spPr>
+          <a:xfrm>
+            <a:off x="457200" y="1188720"/>
+            <a:ext cx="8229600" cy="320040"/>
+          </a:xfrm>
+          <a:prstGeom prst="rect">
+            <a:avLst/>
+          </a:prstGeom>
+          <a:noFill/>
+          <a:ln/>
+        </p:spPr>
+        <p:txBody>
+          <a:bodyPr wrap="square" lIns="0" tIns="0" rIns="0" bIns="0" rtlCol="0" anchor="t"/>
+          <a:lstStyle/>
+          <a:p>
+            <a:pPr indent="0" marL="0">
+              <a:buNone/>
+            </a:pPr>
+            <a:r>
+              <a:rPr lang="en-US" sz="1300" dirty="0">
+                <a:solidFill>
+                  <a:srgbClr val="6B7280"/>
+                </a:solidFill>
+                <a:latin typeface="Meiryo UI" pitchFamily="34" charset="0"/>
+                <a:ea typeface="Meiryo UI" pitchFamily="34" charset="-122"/>
+                <a:cs typeface="Meiryo UI" pitchFamily="34" charset="-120"/>
+              </a:rPr>
+              <a:t>西条市・定員20名で開設した場合の試算（標準シナリオ・2027年4月開設を想定）</a:t>
+            </a:r>
+            <a:endParaRPr lang="en-US" sz="1300" dirty="0"/>
+          </a:p>
+        </p:txBody>
+      </p:sp>
+      <p:sp>
+        <p:nvSpPr>
+          <p:cNvPr id="12" name="Shape 10"/>
+          <p:cNvSpPr/>
+          <p:nvPr/>
+        </p:nvSpPr>
+        <p:spPr>
+          <a:xfrm>
+            <a:off x="457200" y="1691640"/>
+            <a:ext cx="1920240" cy="1600200"/>
           </a:xfrm>
           <a:prstGeom prst="roundRect">
             <a:avLst>
-              <a:gd name="adj" fmla="val 5714"/>
+              <a:gd name="adj" fmla="val 6857"/>
             </a:avLst>
           </a:prstGeom>
           <a:solidFill>
@@ -6989,41 +7236,136 @@
       </p:sp>
       <p:sp>
         <p:nvSpPr>
-          <p:cNvPr id="12" name="Shape 10"/>
-          <p:cNvSpPr/>
-          <p:nvPr/>
-        </p:nvSpPr>
-        <p:spPr>
-          <a:xfrm>
-            <a:off x="640080" y="1618488"/>
-            <a:ext cx="868680" cy="292608"/>
+          <p:cNvPr id="13" name="Text 11"/>
+          <p:cNvSpPr txBox="1"/>
+          <p:nvPr/>
+        </p:nvSpPr>
+        <p:spPr>
+          <a:xfrm>
+            <a:off x="548640" y="1874520"/>
+            <a:ext cx="1737360" cy="548640"/>
+          </a:xfrm>
+          <a:prstGeom prst="rect">
+            <a:avLst/>
+          </a:prstGeom>
+          <a:noFill/>
+          <a:ln/>
+        </p:spPr>
+        <p:txBody>
+          <a:bodyPr wrap="square" lIns="0" tIns="0" rIns="0" bIns="0" rtlCol="0" anchor="ctr"/>
+          <a:lstStyle/>
+          <a:p>
+            <a:pPr algn="ctr" indent="0" marL="0">
+              <a:buNone/>
+            </a:pPr>
+            <a:r>
+              <a:rPr lang="en-US" sz="2200" b="1" dirty="0">
+                <a:solidFill>
+                  <a:srgbClr val="E8505B"/>
+                </a:solidFill>
+                <a:latin typeface="Meiryo UI" pitchFamily="34" charset="0"/>
+                <a:ea typeface="Meiryo UI" pitchFamily="34" charset="-122"/>
+                <a:cs typeface="Meiryo UI" pitchFamily="34" charset="-120"/>
+              </a:rPr>
+              <a:t>18人</a:t>
+            </a:r>
+            <a:endParaRPr lang="en-US" sz="2200" dirty="0"/>
+          </a:p>
+        </p:txBody>
+      </p:sp>
+      <p:sp>
+        <p:nvSpPr>
+          <p:cNvPr id="14" name="Text 12"/>
+          <p:cNvSpPr txBox="1"/>
+          <p:nvPr/>
+        </p:nvSpPr>
+        <p:spPr>
+          <a:xfrm>
+            <a:off x="548640" y="2514600"/>
+            <a:ext cx="1737360" cy="594360"/>
+          </a:xfrm>
+          <a:prstGeom prst="rect">
+            <a:avLst/>
+          </a:prstGeom>
+          <a:noFill/>
+          <a:ln/>
+        </p:spPr>
+        <p:txBody>
+          <a:bodyPr wrap="square" lIns="0" tIns="0" rIns="0" bIns="0" rtlCol="0" anchor="t"/>
+          <a:lstStyle/>
+          <a:p>
+            <a:pPr algn="ctr" indent="0" marL="0">
+              <a:buNone/>
+            </a:pPr>
+            <a:r>
+              <a:rPr lang="en-US" sz="1100" dirty="0">
+                <a:solidFill>
+                  <a:srgbClr val="6B7280"/>
+                </a:solidFill>
+                <a:latin typeface="Meiryo UI" pitchFamily="34" charset="0"/>
+                <a:ea typeface="Meiryo UI" pitchFamily="34" charset="-122"/>
+                <a:cs typeface="Meiryo UI" pitchFamily="34" charset="-120"/>
+              </a:rPr>
+              <a:t>1日の平均利用者数</a:t>
+            </a:r>
+            <a:endParaRPr lang="en-US" sz="1100" dirty="0"/>
+          </a:p>
+          <a:p>
+            <a:pPr algn="ctr" indent="0" marL="0">
+              <a:buNone/>
+            </a:pPr>
+            <a:r>
+              <a:rPr lang="en-US" sz="1100" dirty="0">
+                <a:solidFill>
+                  <a:srgbClr val="6B7280"/>
+                </a:solidFill>
+                <a:latin typeface="Meiryo UI" pitchFamily="34" charset="0"/>
+                <a:ea typeface="Meiryo UI" pitchFamily="34" charset="-122"/>
+                <a:cs typeface="Meiryo UI" pitchFamily="34" charset="-120"/>
+              </a:rPr>
+              <a:t>（安定期）</a:t>
+            </a:r>
+            <a:endParaRPr lang="en-US" sz="1100" dirty="0"/>
+          </a:p>
+        </p:txBody>
+      </p:sp>
+      <p:sp>
+        <p:nvSpPr>
+          <p:cNvPr id="15" name="Shape 13"/>
+          <p:cNvSpPr/>
+          <p:nvPr/>
+        </p:nvSpPr>
+        <p:spPr>
+          <a:xfrm>
+            <a:off x="2560320" y="1691640"/>
+            <a:ext cx="1920240" cy="1600200"/>
           </a:xfrm>
           <a:prstGeom prst="roundRect">
             <a:avLst>
-              <a:gd name="adj" fmla="val 50000"/>
+              <a:gd name="adj" fmla="val 6857"/>
             </a:avLst>
           </a:prstGeom>
           <a:solidFill>
-            <a:srgbClr val="E8505B"/>
-          </a:solidFill>
-          <a:ln w="12700">
-            <a:solidFill>
-              <a:srgbClr val="E8505B"/>
-            </a:solidFill>
-            <a:prstDash val="solid"/>
-          </a:ln>
-        </p:spPr>
-      </p:sp>
-      <p:sp>
-        <p:nvSpPr>
-          <p:cNvPr id="13" name="Text 11"/>
-          <p:cNvSpPr txBox="1"/>
-          <p:nvPr/>
-        </p:nvSpPr>
-        <p:spPr>
-          <a:xfrm>
-            <a:off x="640080" y="1618488"/>
-            <a:ext cx="868680" cy="292608"/>
+            <a:srgbClr val="F4F6FA"/>
+          </a:solidFill>
+          <a:ln w="12700">
+            <a:solidFill>
+              <a:srgbClr val="F4F6FA"/>
+            </a:solidFill>
+            <a:prstDash val="solid"/>
+          </a:ln>
+        </p:spPr>
+      </p:sp>
+      <p:sp>
+        <p:nvSpPr>
+          <p:cNvPr id="16" name="Text 14"/>
+          <p:cNvSpPr txBox="1"/>
+          <p:nvPr/>
+        </p:nvSpPr>
+        <p:spPr>
+          <a:xfrm>
+            <a:off x="2651760" y="1874520"/>
+            <a:ext cx="1737360" cy="548640"/>
           </a:xfrm>
           <a:prstGeom prst="rect">
             <a:avLst/>
@@ -7039,30 +7381,30 @@
               <a:buNone/>
             </a:pPr>
             <a:r>
-              <a:rPr lang="en-US" sz="1000" b="1" dirty="0">
-                <a:solidFill>
-                  <a:srgbClr val="FFFFFF"/>
-                </a:solidFill>
-                <a:latin typeface="Meiryo UI" pitchFamily="34" charset="0"/>
-                <a:ea typeface="Meiryo UI" pitchFamily="34" charset="-122"/>
-                <a:cs typeface="Meiryo UI" pitchFamily="34" charset="-120"/>
-              </a:rPr>
-              <a:t>STEP 1</a:t>
-            </a:r>
-            <a:endParaRPr lang="en-US" sz="1000" dirty="0"/>
-          </a:p>
-        </p:txBody>
-      </p:sp>
-      <p:sp>
-        <p:nvSpPr>
-          <p:cNvPr id="14" name="Text 12"/>
-          <p:cNvSpPr txBox="1"/>
-          <p:nvPr/>
-        </p:nvSpPr>
-        <p:spPr>
-          <a:xfrm>
-            <a:off x="640080" y="2057400"/>
-            <a:ext cx="1600200" cy="411480"/>
+              <a:rPr lang="en-US" sz="2200" b="1" dirty="0">
+                <a:solidFill>
+                  <a:srgbClr val="F39C33"/>
+                </a:solidFill>
+                <a:latin typeface="Meiryo UI" pitchFamily="34" charset="0"/>
+                <a:ea typeface="Meiryo UI" pitchFamily="34" charset="-122"/>
+                <a:cs typeface="Meiryo UI" pitchFamily="34" charset="-120"/>
+              </a:rPr>
+              <a:t>6か月目</a:t>
+            </a:r>
+            <a:endParaRPr lang="en-US" sz="2200" dirty="0"/>
+          </a:p>
+        </p:txBody>
+      </p:sp>
+      <p:sp>
+        <p:nvSpPr>
+          <p:cNvPr id="17" name="Text 15"/>
+          <p:cNvSpPr txBox="1"/>
+          <p:nvPr/>
+        </p:nvSpPr>
+        <p:spPr>
+          <a:xfrm>
+            <a:off x="2651760" y="2514600"/>
+            <a:ext cx="1737360" cy="594360"/>
           </a:xfrm>
           <a:prstGeom prst="rect">
             <a:avLst/>
@@ -7074,53 +7416,11 @@
           <a:bodyPr wrap="square" lIns="0" tIns="0" rIns="0" bIns="0" rtlCol="0" anchor="t"/>
           <a:lstStyle/>
           <a:p>
-            <a:pPr indent="0" marL="0">
-              <a:buNone/>
-            </a:pPr>
-            <a:r>
-              <a:rPr lang="en-US" sz="1700" b="1" dirty="0">
-                <a:solidFill>
-                  <a:srgbClr val="2E3440"/>
-                </a:solidFill>
-                <a:latin typeface="Meiryo UI" pitchFamily="34" charset="0"/>
-                <a:ea typeface="Meiryo UI" pitchFamily="34" charset="-122"/>
-                <a:cs typeface="Meiryo UI" pitchFamily="34" charset="-120"/>
-              </a:rPr>
-              <a:t>愛媛で実践</a:t>
-            </a:r>
-            <a:endParaRPr lang="en-US" sz="1700" dirty="0"/>
-          </a:p>
-        </p:txBody>
-      </p:sp>
-      <p:sp>
-        <p:nvSpPr>
-          <p:cNvPr id="15" name="Text 13"/>
-          <p:cNvSpPr txBox="1"/>
-          <p:nvPr/>
-        </p:nvSpPr>
-        <p:spPr>
-          <a:xfrm>
-            <a:off x="640080" y="2560320"/>
-            <a:ext cx="1691640" cy="914400"/>
-          </a:xfrm>
-          <a:prstGeom prst="rect">
-            <a:avLst/>
-          </a:prstGeom>
-          <a:noFill/>
-          <a:ln/>
-        </p:spPr>
-        <p:txBody>
-          <a:bodyPr wrap="square" lIns="0" tIns="0" rIns="0" bIns="0" rtlCol="0" anchor="t"/>
-          <a:lstStyle/>
-          <a:p>
-            <a:pPr indent="0" marL="0">
-              <a:lnSpc>
-                <a:spcPct val="115000"/>
-              </a:lnSpc>
-              <a:buNone/>
-            </a:pPr>
-            <a:r>
-              <a:rPr lang="en-US" sz="1050" dirty="0">
+            <a:pPr algn="ctr" indent="0" marL="0">
+              <a:buNone/>
+            </a:pPr>
+            <a:r>
+              <a:rPr lang="en-US" sz="1100" dirty="0">
                 <a:solidFill>
                   <a:srgbClr val="6B7280"/>
                 </a:solidFill>
@@ -7128,66 +7428,26 @@
                 <a:ea typeface="Meiryo UI" pitchFamily="34" charset="-122"/>
                 <a:cs typeface="Meiryo UI" pitchFamily="34" charset="-120"/>
               </a:rPr>
-              <a:t>放デイ・児童クラブ・</a:t>
-            </a:r>
-            <a:endParaRPr lang="en-US" sz="1050" dirty="0"/>
-          </a:p>
-          <a:p>
-            <a:pPr indent="0" marL="0">
-              <a:lnSpc>
-                <a:spcPct val="115000"/>
-              </a:lnSpc>
-              <a:buNone/>
-            </a:pPr>
-            <a:r>
-              <a:rPr lang="en-US" sz="1050" dirty="0">
-                <a:solidFill>
-                  <a:srgbClr val="6B7280"/>
-                </a:solidFill>
-                <a:latin typeface="Meiryo UI" pitchFamily="34" charset="0"/>
-                <a:ea typeface="Meiryo UI" pitchFamily="34" charset="-122"/>
-                <a:cs typeface="Meiryo UI" pitchFamily="34" charset="-120"/>
-              </a:rPr>
-              <a:t>就労へとつながる</a:t>
-            </a:r>
-            <a:endParaRPr lang="en-US" sz="1050" dirty="0"/>
-          </a:p>
-          <a:p>
-            <a:pPr indent="0" marL="0">
-              <a:lnSpc>
-                <a:spcPct val="115000"/>
-              </a:lnSpc>
-              <a:buNone/>
-            </a:pPr>
-            <a:r>
-              <a:rPr lang="en-US" sz="1050" dirty="0">
-                <a:solidFill>
-                  <a:srgbClr val="6B7280"/>
-                </a:solidFill>
-                <a:latin typeface="Meiryo UI" pitchFamily="34" charset="0"/>
-                <a:ea typeface="Meiryo UI" pitchFamily="34" charset="-122"/>
-                <a:cs typeface="Meiryo UI" pitchFamily="34" charset="-120"/>
-              </a:rPr>
-              <a:t>トータルサポートの形</a:t>
-            </a:r>
-            <a:endParaRPr lang="en-US" sz="1050" dirty="0"/>
-          </a:p>
-        </p:txBody>
-      </p:sp>
-      <p:sp>
-        <p:nvSpPr>
-          <p:cNvPr id="16" name="Shape 14"/>
-          <p:cNvSpPr/>
-          <p:nvPr/>
-        </p:nvSpPr>
-        <p:spPr>
-          <a:xfrm>
-            <a:off x="2560320" y="1417320"/>
-            <a:ext cx="1920240" cy="2148840"/>
+              <a:t>単月で黒字化</a:t>
+            </a:r>
+            <a:endParaRPr lang="en-US" sz="1100" dirty="0"/>
+          </a:p>
+        </p:txBody>
+      </p:sp>
+      <p:sp>
+        <p:nvSpPr>
+          <p:cNvPr id="18" name="Shape 16"/>
+          <p:cNvSpPr/>
+          <p:nvPr/>
+        </p:nvSpPr>
+        <p:spPr>
+          <a:xfrm>
+            <a:off x="4663440" y="1691640"/>
+            <a:ext cx="1920240" cy="1600200"/>
           </a:xfrm>
           <a:prstGeom prst="roundRect">
             <a:avLst>
-              <a:gd name="adj" fmla="val 5714"/>
+              <a:gd name="adj" fmla="val 6857"/>
             </a:avLst>
           </a:prstGeom>
           <a:solidFill>
@@ -7203,41 +7463,136 @@
       </p:sp>
       <p:sp>
         <p:nvSpPr>
-          <p:cNvPr id="17" name="Shape 15"/>
-          <p:cNvSpPr/>
-          <p:nvPr/>
-        </p:nvSpPr>
-        <p:spPr>
-          <a:xfrm>
-            <a:off x="2743200" y="1618488"/>
-            <a:ext cx="868680" cy="292608"/>
+          <p:cNvPr id="19" name="Text 17"/>
+          <p:cNvSpPr txBox="1"/>
+          <p:nvPr/>
+        </p:nvSpPr>
+        <p:spPr>
+          <a:xfrm>
+            <a:off x="4754880" y="1874520"/>
+            <a:ext cx="1737360" cy="548640"/>
+          </a:xfrm>
+          <a:prstGeom prst="rect">
+            <a:avLst/>
+          </a:prstGeom>
+          <a:noFill/>
+          <a:ln/>
+        </p:spPr>
+        <p:txBody>
+          <a:bodyPr wrap="square" lIns="0" tIns="0" rIns="0" bIns="0" rtlCol="0" anchor="ctr"/>
+          <a:lstStyle/>
+          <a:p>
+            <a:pPr algn="ctr" indent="0" marL="0">
+              <a:buNone/>
+            </a:pPr>
+            <a:r>
+              <a:rPr lang="en-US" sz="2200" b="1" dirty="0">
+                <a:solidFill>
+                  <a:srgbClr val="5DBB63"/>
+                </a:solidFill>
+                <a:latin typeface="Meiryo UI" pitchFamily="34" charset="0"/>
+                <a:ea typeface="Meiryo UI" pitchFamily="34" charset="-122"/>
+                <a:cs typeface="Meiryo UI" pitchFamily="34" charset="-120"/>
+              </a:rPr>
+              <a:t>27か月目</a:t>
+            </a:r>
+            <a:endParaRPr lang="en-US" sz="2200" dirty="0"/>
+          </a:p>
+        </p:txBody>
+      </p:sp>
+      <p:sp>
+        <p:nvSpPr>
+          <p:cNvPr id="20" name="Text 18"/>
+          <p:cNvSpPr txBox="1"/>
+          <p:nvPr/>
+        </p:nvSpPr>
+        <p:spPr>
+          <a:xfrm>
+            <a:off x="4754880" y="2514600"/>
+            <a:ext cx="1737360" cy="594360"/>
+          </a:xfrm>
+          <a:prstGeom prst="rect">
+            <a:avLst/>
+          </a:prstGeom>
+          <a:noFill/>
+          <a:ln/>
+        </p:spPr>
+        <p:txBody>
+          <a:bodyPr wrap="square" lIns="0" tIns="0" rIns="0" bIns="0" rtlCol="0" anchor="t"/>
+          <a:lstStyle/>
+          <a:p>
+            <a:pPr algn="ctr" indent="0" marL="0">
+              <a:buNone/>
+            </a:pPr>
+            <a:r>
+              <a:rPr lang="en-US" sz="1100" dirty="0">
+                <a:solidFill>
+                  <a:srgbClr val="6B7280"/>
+                </a:solidFill>
+                <a:latin typeface="Meiryo UI" pitchFamily="34" charset="0"/>
+                <a:ea typeface="Meiryo UI" pitchFamily="34" charset="-122"/>
+                <a:cs typeface="Meiryo UI" pitchFamily="34" charset="-120"/>
+              </a:rPr>
+              <a:t>初期投資</a:t>
+            </a:r>
+            <a:endParaRPr lang="en-US" sz="1100" dirty="0"/>
+          </a:p>
+          <a:p>
+            <a:pPr algn="ctr" indent="0" marL="0">
+              <a:buNone/>
+            </a:pPr>
+            <a:r>
+              <a:rPr lang="en-US" sz="1100" dirty="0">
+                <a:solidFill>
+                  <a:srgbClr val="6B7280"/>
+                </a:solidFill>
+                <a:latin typeface="Meiryo UI" pitchFamily="34" charset="0"/>
+                <a:ea typeface="Meiryo UI" pitchFamily="34" charset="-122"/>
+                <a:cs typeface="Meiryo UI" pitchFamily="34" charset="-120"/>
+              </a:rPr>
+              <a:t>約900万円を回収</a:t>
+            </a:r>
+            <a:endParaRPr lang="en-US" sz="1100" dirty="0"/>
+          </a:p>
+        </p:txBody>
+      </p:sp>
+      <p:sp>
+        <p:nvSpPr>
+          <p:cNvPr id="21" name="Shape 19"/>
+          <p:cNvSpPr/>
+          <p:nvPr/>
+        </p:nvSpPr>
+        <p:spPr>
+          <a:xfrm>
+            <a:off x="6766560" y="1691640"/>
+            <a:ext cx="1920240" cy="1600200"/>
           </a:xfrm>
           <a:prstGeom prst="roundRect">
             <a:avLst>
-              <a:gd name="adj" fmla="val 50000"/>
+              <a:gd name="adj" fmla="val 6857"/>
             </a:avLst>
           </a:prstGeom>
           <a:solidFill>
-            <a:srgbClr val="F2C230"/>
-          </a:solidFill>
-          <a:ln w="12700">
-            <a:solidFill>
-              <a:srgbClr val="F2C230"/>
-            </a:solidFill>
-            <a:prstDash val="solid"/>
-          </a:ln>
-        </p:spPr>
-      </p:sp>
-      <p:sp>
-        <p:nvSpPr>
-          <p:cNvPr id="18" name="Text 16"/>
-          <p:cNvSpPr txBox="1"/>
-          <p:nvPr/>
-        </p:nvSpPr>
-        <p:spPr>
-          <a:xfrm>
-            <a:off x="2743200" y="1618488"/>
-            <a:ext cx="868680" cy="292608"/>
+            <a:srgbClr val="F4F6FA"/>
+          </a:solidFill>
+          <a:ln w="12700">
+            <a:solidFill>
+              <a:srgbClr val="F4F6FA"/>
+            </a:solidFill>
+            <a:prstDash val="solid"/>
+          </a:ln>
+        </p:spPr>
+      </p:sp>
+      <p:sp>
+        <p:nvSpPr>
+          <p:cNvPr id="22" name="Text 20"/>
+          <p:cNvSpPr txBox="1"/>
+          <p:nvPr/>
+        </p:nvSpPr>
+        <p:spPr>
+          <a:xfrm>
+            <a:off x="6858000" y="1874520"/>
+            <a:ext cx="1737360" cy="548640"/>
           </a:xfrm>
           <a:prstGeom prst="rect">
             <a:avLst/>
@@ -7253,7 +7608,127 @@
               <a:buNone/>
             </a:pPr>
             <a:r>
-              <a:rPr lang="en-US" sz="1000" b="1" dirty="0">
+              <a:rPr lang="en-US" sz="2200" b="1" dirty="0">
+                <a:solidFill>
+                  <a:srgbClr val="4A6FC7"/>
+                </a:solidFill>
+                <a:latin typeface="Meiryo UI" pitchFamily="34" charset="0"/>
+                <a:ea typeface="Meiryo UI" pitchFamily="34" charset="-122"/>
+                <a:cs typeface="Meiryo UI" pitchFamily="34" charset="-120"/>
+              </a:rPr>
+              <a:t>1,140万円</a:t>
+            </a:r>
+            <a:endParaRPr lang="en-US" sz="2200" dirty="0"/>
+          </a:p>
+        </p:txBody>
+      </p:sp>
+      <p:sp>
+        <p:nvSpPr>
+          <p:cNvPr id="23" name="Text 21"/>
+          <p:cNvSpPr txBox="1"/>
+          <p:nvPr/>
+        </p:nvSpPr>
+        <p:spPr>
+          <a:xfrm>
+            <a:off x="6858000" y="2514600"/>
+            <a:ext cx="1737360" cy="594360"/>
+          </a:xfrm>
+          <a:prstGeom prst="rect">
+            <a:avLst/>
+          </a:prstGeom>
+          <a:noFill/>
+          <a:ln/>
+        </p:spPr>
+        <p:txBody>
+          <a:bodyPr wrap="square" lIns="0" tIns="0" rIns="0" bIns="0" rtlCol="0" anchor="t"/>
+          <a:lstStyle/>
+          <a:p>
+            <a:pPr algn="ctr" indent="0" marL="0">
+              <a:buNone/>
+            </a:pPr>
+            <a:r>
+              <a:rPr lang="en-US" sz="1100" dirty="0">
+                <a:solidFill>
+                  <a:srgbClr val="6B7280"/>
+                </a:solidFill>
+                <a:latin typeface="Meiryo UI" pitchFamily="34" charset="0"/>
+                <a:ea typeface="Meiryo UI" pitchFamily="34" charset="-122"/>
+                <a:cs typeface="Meiryo UI" pitchFamily="34" charset="-120"/>
+              </a:rPr>
+              <a:t>3年目の営業利益</a:t>
+            </a:r>
+            <a:endParaRPr lang="en-US" sz="1100" dirty="0"/>
+          </a:p>
+          <a:p>
+            <a:pPr algn="ctr" indent="0" marL="0">
+              <a:buNone/>
+            </a:pPr>
+            <a:r>
+              <a:rPr lang="en-US" sz="1100" dirty="0">
+                <a:solidFill>
+                  <a:srgbClr val="6B7280"/>
+                </a:solidFill>
+                <a:latin typeface="Meiryo UI" pitchFamily="34" charset="0"/>
+                <a:ea typeface="Meiryo UI" pitchFamily="34" charset="-122"/>
+                <a:cs typeface="Meiryo UI" pitchFamily="34" charset="-120"/>
+              </a:rPr>
+              <a:t>（概算）</a:t>
+            </a:r>
+            <a:endParaRPr lang="en-US" sz="1100" dirty="0"/>
+          </a:p>
+        </p:txBody>
+      </p:sp>
+      <p:sp>
+        <p:nvSpPr>
+          <p:cNvPr id="24" name="Shape 22"/>
+          <p:cNvSpPr/>
+          <p:nvPr/>
+        </p:nvSpPr>
+        <p:spPr>
+          <a:xfrm>
+            <a:off x="457200" y="3520440"/>
+            <a:ext cx="329184" cy="329184"/>
+          </a:xfrm>
+          <a:prstGeom prst="ellipse">
+            <a:avLst/>
+          </a:prstGeom>
+          <a:solidFill>
+            <a:srgbClr val="3FA7D6"/>
+          </a:solidFill>
+          <a:ln w="12700">
+            <a:solidFill>
+              <a:srgbClr val="3FA7D6"/>
+            </a:solidFill>
+            <a:prstDash val="solid"/>
+          </a:ln>
+        </p:spPr>
+      </p:sp>
+      <p:sp>
+        <p:nvSpPr>
+          <p:cNvPr id="25" name="Text 23"/>
+          <p:cNvSpPr txBox="1"/>
+          <p:nvPr/>
+        </p:nvSpPr>
+        <p:spPr>
+          <a:xfrm>
+            <a:off x="457200" y="3520440"/>
+            <a:ext cx="329184" cy="329184"/>
+          </a:xfrm>
+          <a:prstGeom prst="rect">
+            <a:avLst/>
+          </a:prstGeom>
+          <a:noFill/>
+          <a:ln/>
+        </p:spPr>
+        <p:txBody>
+          <a:bodyPr wrap="square" lIns="0" tIns="0" rIns="0" bIns="0" rtlCol="0" anchor="ctr"/>
+          <a:lstStyle/>
+          <a:p>
+            <a:pPr algn="ctr" indent="0" marL="0">
+              <a:buNone/>
+            </a:pPr>
+            <a:r>
+              <a:rPr lang="en-US" sz="1200" b="1" dirty="0">
                 <a:solidFill>
                   <a:srgbClr val="FFFFFF"/>
                 </a:solidFill>
@@ -7261,22 +7736,61 @@
                 <a:ea typeface="Meiryo UI" pitchFamily="34" charset="-122"/>
                 <a:cs typeface="Meiryo UI" pitchFamily="34" charset="-120"/>
               </a:rPr>
-              <a:t>STEP 2</a:t>
-            </a:r>
-            <a:endParaRPr lang="en-US" sz="1000" dirty="0"/>
-          </a:p>
-        </p:txBody>
-      </p:sp>
-      <p:sp>
-        <p:nvSpPr>
-          <p:cNvPr id="19" name="Text 17"/>
-          <p:cNvSpPr txBox="1"/>
-          <p:nvPr/>
-        </p:nvSpPr>
-        <p:spPr>
-          <a:xfrm>
-            <a:off x="2743200" y="2057400"/>
-            <a:ext cx="1600200" cy="411480"/>
+              <a:t>1</a:t>
+            </a:r>
+            <a:endParaRPr lang="en-US" sz="1200" dirty="0"/>
+          </a:p>
+        </p:txBody>
+      </p:sp>
+      <p:sp>
+        <p:nvSpPr>
+          <p:cNvPr id="26" name="Text 24"/>
+          <p:cNvSpPr txBox="1"/>
+          <p:nvPr/>
+        </p:nvSpPr>
+        <p:spPr>
+          <a:xfrm>
+            <a:off x="914400" y="3502152"/>
+            <a:ext cx="3566160" cy="320040"/>
+          </a:xfrm>
+          <a:prstGeom prst="rect">
+            <a:avLst/>
+          </a:prstGeom>
+          <a:noFill/>
+          <a:ln/>
+        </p:spPr>
+        <p:txBody>
+          <a:bodyPr wrap="square" lIns="0" tIns="0" rIns="0" bIns="0" rtlCol="0" anchor="ctr"/>
+          <a:lstStyle/>
+          <a:p>
+            <a:pPr indent="0" marL="0">
+              <a:buNone/>
+            </a:pPr>
+            <a:r>
+              <a:rPr lang="en-US" sz="1350" b="1" dirty="0">
+                <a:solidFill>
+                  <a:srgbClr val="2E3440"/>
+                </a:solidFill>
+                <a:latin typeface="Meiryo UI" pitchFamily="34" charset="0"/>
+                <a:ea typeface="Meiryo UI" pitchFamily="34" charset="-122"/>
+                <a:cs typeface="Meiryo UI" pitchFamily="34" charset="-120"/>
+              </a:rPr>
+              <a:t>放デイ卒業生の受け皿</a:t>
+            </a:r>
+            <a:endParaRPr lang="en-US" sz="1350" dirty="0"/>
+          </a:p>
+        </p:txBody>
+      </p:sp>
+      <p:sp>
+        <p:nvSpPr>
+          <p:cNvPr id="27" name="Text 25"/>
+          <p:cNvSpPr txBox="1"/>
+          <p:nvPr/>
+        </p:nvSpPr>
+        <p:spPr>
+          <a:xfrm>
+            <a:off x="914400" y="3840480"/>
+            <a:ext cx="3566160" cy="548640"/>
           </a:xfrm>
           <a:prstGeom prst="rect">
             <a:avLst/>
@@ -7292,7 +7806,110 @@
               <a:buNone/>
             </a:pPr>
             <a:r>
-              <a:rPr lang="en-US" sz="1700" b="1" dirty="0">
+              <a:rPr lang="en-US" sz="1100" dirty="0">
+                <a:solidFill>
+                  <a:srgbClr val="6B7280"/>
+                </a:solidFill>
+                <a:latin typeface="Meiryo UI" pitchFamily="34" charset="0"/>
+                <a:ea typeface="Meiryo UI" pitchFamily="34" charset="-122"/>
+                <a:cs typeface="Meiryo UI" pitchFamily="34" charset="-120"/>
+              </a:rPr>
+              <a:t>採算ラインは1日12人前後。日吉・西条の卒業予定者の把握が集客の土台</a:t>
+            </a:r>
+            <a:endParaRPr lang="en-US" sz="1100" dirty="0"/>
+          </a:p>
+        </p:txBody>
+      </p:sp>
+      <p:sp>
+        <p:nvSpPr>
+          <p:cNvPr id="28" name="Shape 26"/>
+          <p:cNvSpPr/>
+          <p:nvPr/>
+        </p:nvSpPr>
+        <p:spPr>
+          <a:xfrm>
+            <a:off x="4663440" y="3520440"/>
+            <a:ext cx="329184" cy="329184"/>
+          </a:xfrm>
+          <a:prstGeom prst="ellipse">
+            <a:avLst/>
+          </a:prstGeom>
+          <a:solidFill>
+            <a:srgbClr val="9A6BC4"/>
+          </a:solidFill>
+          <a:ln w="12700">
+            <a:solidFill>
+              <a:srgbClr val="9A6BC4"/>
+            </a:solidFill>
+            <a:prstDash val="solid"/>
+          </a:ln>
+        </p:spPr>
+      </p:sp>
+      <p:sp>
+        <p:nvSpPr>
+          <p:cNvPr id="29" name="Text 27"/>
+          <p:cNvSpPr txBox="1"/>
+          <p:nvPr/>
+        </p:nvSpPr>
+        <p:spPr>
+          <a:xfrm>
+            <a:off x="4663440" y="3520440"/>
+            <a:ext cx="329184" cy="329184"/>
+          </a:xfrm>
+          <a:prstGeom prst="rect">
+            <a:avLst/>
+          </a:prstGeom>
+          <a:noFill/>
+          <a:ln/>
+        </p:spPr>
+        <p:txBody>
+          <a:bodyPr wrap="square" lIns="0" tIns="0" rIns="0" bIns="0" rtlCol="0" anchor="ctr"/>
+          <a:lstStyle/>
+          <a:p>
+            <a:pPr algn="ctr" indent="0" marL="0">
+              <a:buNone/>
+            </a:pPr>
+            <a:r>
+              <a:rPr lang="en-US" sz="1200" b="1" dirty="0">
+                <a:solidFill>
+                  <a:srgbClr val="FFFFFF"/>
+                </a:solidFill>
+                <a:latin typeface="Meiryo UI" pitchFamily="34" charset="0"/>
+                <a:ea typeface="Meiryo UI" pitchFamily="34" charset="-122"/>
+                <a:cs typeface="Meiryo UI" pitchFamily="34" charset="-120"/>
+              </a:rPr>
+              <a:t>2</a:t>
+            </a:r>
+            <a:endParaRPr lang="en-US" sz="1200" dirty="0"/>
+          </a:p>
+        </p:txBody>
+      </p:sp>
+      <p:sp>
+        <p:nvSpPr>
+          <p:cNvPr id="30" name="Text 28"/>
+          <p:cNvSpPr txBox="1"/>
+          <p:nvPr/>
+        </p:nvSpPr>
+        <p:spPr>
+          <a:xfrm>
+            <a:off x="5120640" y="3502152"/>
+            <a:ext cx="3566160" cy="320040"/>
+          </a:xfrm>
+          <a:prstGeom prst="rect">
+            <a:avLst/>
+          </a:prstGeom>
+          <a:noFill/>
+          <a:ln/>
+        </p:spPr>
+        <p:txBody>
+          <a:bodyPr wrap="square" lIns="0" tIns="0" rIns="0" bIns="0" rtlCol="0" anchor="ctr"/>
+          <a:lstStyle/>
+          <a:p>
+            <a:pPr indent="0" marL="0">
+              <a:buNone/>
+            </a:pPr>
+            <a:r>
+              <a:rPr lang="en-US" sz="1350" b="1" dirty="0">
                 <a:solidFill>
                   <a:srgbClr val="2E3440"/>
                 </a:solidFill>
@@ -7300,22 +7917,22 @@
                 <a:ea typeface="Meiryo UI" pitchFamily="34" charset="-122"/>
                 <a:cs typeface="Meiryo UI" pitchFamily="34" charset="-120"/>
               </a:rPr>
-              <a:t>四国支社</a:t>
-            </a:r>
-            <a:endParaRPr lang="en-US" sz="1700" dirty="0"/>
-          </a:p>
-        </p:txBody>
-      </p:sp>
-      <p:sp>
-        <p:nvSpPr>
-          <p:cNvPr id="20" name="Text 18"/>
-          <p:cNvSpPr txBox="1"/>
-          <p:nvPr/>
-        </p:nvSpPr>
-        <p:spPr>
-          <a:xfrm>
-            <a:off x="2743200" y="2560320"/>
-            <a:ext cx="1691640" cy="914400"/>
+              <a:t>工賃1.8万円の壁</a:t>
+            </a:r>
+            <a:endParaRPr lang="en-US" sz="1350" dirty="0"/>
+          </a:p>
+        </p:txBody>
+      </p:sp>
+      <p:sp>
+        <p:nvSpPr>
+          <p:cNvPr id="31" name="Text 29"/>
+          <p:cNvSpPr txBox="1"/>
+          <p:nvPr/>
+        </p:nvSpPr>
+        <p:spPr>
+          <a:xfrm>
+            <a:off x="5120640" y="3840480"/>
+            <a:ext cx="3566160" cy="548640"/>
           </a:xfrm>
           <a:prstGeom prst="rect">
             <a:avLst/>
@@ -7328,13 +7945,10 @@
           <a:lstStyle/>
           <a:p>
             <a:pPr indent="0" marL="0">
-              <a:lnSpc>
-                <a:spcPct val="115000"/>
-              </a:lnSpc>
-              <a:buNone/>
-            </a:pPr>
-            <a:r>
-              <a:rPr lang="en-US" sz="1050" dirty="0">
+              <a:buNone/>
+            </a:pPr>
+            <a:r>
+              <a:rPr lang="en-US" sz="1100" dirty="0">
                 <a:solidFill>
                   <a:srgbClr val="6B7280"/>
                 </a:solidFill>
@@ -7342,19 +7956,38 @@
                 <a:ea typeface="Meiryo UI" pitchFamily="34" charset="-122"/>
                 <a:cs typeface="Meiryo UI" pitchFamily="34" charset="-120"/>
               </a:rPr>
-              <a:t>愛媛から四国全域へ</a:t>
-            </a:r>
-            <a:endParaRPr lang="en-US" sz="1050" dirty="0"/>
-          </a:p>
+              <a:t>令和8年6月の見直しで区分の基準額が上昇。作業の開拓が収益に直結</a:t>
+            </a:r>
+            <a:endParaRPr lang="en-US" sz="1100" dirty="0"/>
+          </a:p>
+        </p:txBody>
+      </p:sp>
+      <p:sp>
+        <p:nvSpPr>
+          <p:cNvPr id="32" name="Text 30"/>
+          <p:cNvSpPr txBox="1"/>
+          <p:nvPr/>
+        </p:nvSpPr>
+        <p:spPr>
+          <a:xfrm>
+            <a:off x="457200" y="4526280"/>
+            <a:ext cx="7589520" cy="274320"/>
+          </a:xfrm>
+          <a:prstGeom prst="rect">
+            <a:avLst/>
+          </a:prstGeom>
+          <a:noFill/>
+          <a:ln/>
+        </p:spPr>
+        <p:txBody>
+          <a:bodyPr wrap="square" lIns="0" tIns="0" rIns="0" bIns="0" rtlCol="0" anchor="t"/>
+          <a:lstStyle/>
           <a:p>
             <a:pPr indent="0" marL="0">
-              <a:lnSpc>
-                <a:spcPct val="115000"/>
-              </a:lnSpc>
-              <a:buNone/>
-            </a:pPr>
-            <a:r>
-              <a:rPr lang="en-US" sz="1050" dirty="0">
+              <a:buNone/>
+            </a:pPr>
+            <a:r>
+              <a:rPr lang="en-US" sz="900" dirty="0">
                 <a:solidFill>
                   <a:srgbClr val="6B7280"/>
                 </a:solidFill>
@@ -7362,483 +7995,9 @@
                 <a:ea typeface="Meiryo UI" pitchFamily="34" charset="-122"/>
                 <a:cs typeface="Meiryo UI" pitchFamily="34" charset="-120"/>
               </a:rPr>
-              <a:t>インドネシア特定技能</a:t>
-            </a:r>
-            <a:endParaRPr lang="en-US" sz="1050" dirty="0"/>
-          </a:p>
-          <a:p>
-            <a:pPr indent="0" marL="0">
-              <a:lnSpc>
-                <a:spcPct val="115000"/>
-              </a:lnSpc>
-              <a:buNone/>
-            </a:pPr>
-            <a:r>
-              <a:rPr lang="en-US" sz="1050" dirty="0">
-                <a:solidFill>
-                  <a:srgbClr val="6B7280"/>
-                </a:solidFill>
-                <a:latin typeface="Meiryo UI" pitchFamily="34" charset="0"/>
-                <a:ea typeface="Meiryo UI" pitchFamily="34" charset="-122"/>
-                <a:cs typeface="Meiryo UI" pitchFamily="34" charset="-120"/>
-              </a:rPr>
-              <a:t>等の人材も含めて</a:t>
-            </a:r>
-            <a:endParaRPr lang="en-US" sz="1050" dirty="0"/>
-          </a:p>
-        </p:txBody>
-      </p:sp>
-      <p:sp>
-        <p:nvSpPr>
-          <p:cNvPr id="21" name="Shape 19"/>
-          <p:cNvSpPr/>
-          <p:nvPr/>
-        </p:nvSpPr>
-        <p:spPr>
-          <a:xfrm>
-            <a:off x="4663440" y="1417320"/>
-            <a:ext cx="1920240" cy="2148840"/>
-          </a:xfrm>
-          <a:prstGeom prst="roundRect">
-            <a:avLst>
-              <a:gd name="adj" fmla="val 5714"/>
-            </a:avLst>
-          </a:prstGeom>
-          <a:solidFill>
-            <a:srgbClr val="F4F6FA"/>
-          </a:solidFill>
-          <a:ln w="12700">
-            <a:solidFill>
-              <a:srgbClr val="F4F6FA"/>
-            </a:solidFill>
-            <a:prstDash val="solid"/>
-          </a:ln>
-        </p:spPr>
-      </p:sp>
-      <p:sp>
-        <p:nvSpPr>
-          <p:cNvPr id="22" name="Shape 20"/>
-          <p:cNvSpPr/>
-          <p:nvPr/>
-        </p:nvSpPr>
-        <p:spPr>
-          <a:xfrm>
-            <a:off x="4846320" y="1618488"/>
-            <a:ext cx="868680" cy="292608"/>
-          </a:xfrm>
-          <a:prstGeom prst="roundRect">
-            <a:avLst>
-              <a:gd name="adj" fmla="val 50000"/>
-            </a:avLst>
-          </a:prstGeom>
-          <a:solidFill>
-            <a:srgbClr val="3FA7D6"/>
-          </a:solidFill>
-          <a:ln w="12700">
-            <a:solidFill>
-              <a:srgbClr val="3FA7D6"/>
-            </a:solidFill>
-            <a:prstDash val="solid"/>
-          </a:ln>
-        </p:spPr>
-      </p:sp>
-      <p:sp>
-        <p:nvSpPr>
-          <p:cNvPr id="23" name="Text 21"/>
-          <p:cNvSpPr txBox="1"/>
-          <p:nvPr/>
-        </p:nvSpPr>
-        <p:spPr>
-          <a:xfrm>
-            <a:off x="4846320" y="1618488"/>
-            <a:ext cx="868680" cy="292608"/>
-          </a:xfrm>
-          <a:prstGeom prst="rect">
-            <a:avLst/>
-          </a:prstGeom>
-          <a:noFill/>
-          <a:ln/>
-        </p:spPr>
-        <p:txBody>
-          <a:bodyPr wrap="square" lIns="0" tIns="0" rIns="0" bIns="0" rtlCol="0" anchor="ctr"/>
-          <a:lstStyle/>
-          <a:p>
-            <a:pPr algn="ctr" indent="0" marL="0">
-              <a:buNone/>
-            </a:pPr>
-            <a:r>
-              <a:rPr lang="en-US" sz="1000" b="1" dirty="0">
-                <a:solidFill>
-                  <a:srgbClr val="FFFFFF"/>
-                </a:solidFill>
-                <a:latin typeface="Meiryo UI" pitchFamily="34" charset="0"/>
-                <a:ea typeface="Meiryo UI" pitchFamily="34" charset="-122"/>
-                <a:cs typeface="Meiryo UI" pitchFamily="34" charset="-120"/>
-              </a:rPr>
-              <a:t>STEP 3</a:t>
-            </a:r>
-            <a:endParaRPr lang="en-US" sz="1000" dirty="0"/>
-          </a:p>
-        </p:txBody>
-      </p:sp>
-      <p:sp>
-        <p:nvSpPr>
-          <p:cNvPr id="24" name="Text 22"/>
-          <p:cNvSpPr txBox="1"/>
-          <p:nvPr/>
-        </p:nvSpPr>
-        <p:spPr>
-          <a:xfrm>
-            <a:off x="4846320" y="2057400"/>
-            <a:ext cx="1600200" cy="411480"/>
-          </a:xfrm>
-          <a:prstGeom prst="rect">
-            <a:avLst/>
-          </a:prstGeom>
-          <a:noFill/>
-          <a:ln/>
-        </p:spPr>
-        <p:txBody>
-          <a:bodyPr wrap="square" lIns="0" tIns="0" rIns="0" bIns="0" rtlCol="0" anchor="t"/>
-          <a:lstStyle/>
-          <a:p>
-            <a:pPr indent="0" marL="0">
-              <a:buNone/>
-            </a:pPr>
-            <a:r>
-              <a:rPr lang="en-US" sz="1700" b="1" dirty="0">
-                <a:solidFill>
-                  <a:srgbClr val="2E3440"/>
-                </a:solidFill>
-                <a:latin typeface="Meiryo UI" pitchFamily="34" charset="0"/>
-                <a:ea typeface="Meiryo UI" pitchFamily="34" charset="-122"/>
-                <a:cs typeface="Meiryo UI" pitchFamily="34" charset="-120"/>
-              </a:rPr>
-              <a:t>関西・中部支社</a:t>
-            </a:r>
-            <a:endParaRPr lang="en-US" sz="1700" dirty="0"/>
-          </a:p>
-        </p:txBody>
-      </p:sp>
-      <p:sp>
-        <p:nvSpPr>
-          <p:cNvPr id="25" name="Text 23"/>
-          <p:cNvSpPr txBox="1"/>
-          <p:nvPr/>
-        </p:nvSpPr>
-        <p:spPr>
-          <a:xfrm>
-            <a:off x="4846320" y="2560320"/>
-            <a:ext cx="1691640" cy="914400"/>
-          </a:xfrm>
-          <a:prstGeom prst="rect">
-            <a:avLst/>
-          </a:prstGeom>
-          <a:noFill/>
-          <a:ln/>
-        </p:spPr>
-        <p:txBody>
-          <a:bodyPr wrap="square" lIns="0" tIns="0" rIns="0" bIns="0" rtlCol="0" anchor="t"/>
-          <a:lstStyle/>
-          <a:p>
-            <a:pPr indent="0" marL="0">
-              <a:lnSpc>
-                <a:spcPct val="115000"/>
-              </a:lnSpc>
-              <a:buNone/>
-            </a:pPr>
-            <a:r>
-              <a:rPr lang="en-US" sz="1050" dirty="0">
-                <a:solidFill>
-                  <a:srgbClr val="6B7280"/>
-                </a:solidFill>
-                <a:latin typeface="Meiryo UI" pitchFamily="34" charset="0"/>
-                <a:ea typeface="Meiryo UI" pitchFamily="34" charset="-122"/>
-                <a:cs typeface="Meiryo UI" pitchFamily="34" charset="-120"/>
-              </a:rPr>
-              <a:t>エリアごとの拠点を</a:t>
-            </a:r>
-            <a:endParaRPr lang="en-US" sz="1050" dirty="0"/>
-          </a:p>
-          <a:p>
-            <a:pPr indent="0" marL="0">
-              <a:lnSpc>
-                <a:spcPct val="115000"/>
-              </a:lnSpc>
-              <a:buNone/>
-            </a:pPr>
-            <a:r>
-              <a:rPr lang="en-US" sz="1050" dirty="0">
-                <a:solidFill>
-                  <a:srgbClr val="6B7280"/>
-                </a:solidFill>
-                <a:latin typeface="Meiryo UI" pitchFamily="34" charset="0"/>
-                <a:ea typeface="Meiryo UI" pitchFamily="34" charset="-122"/>
-                <a:cs typeface="Meiryo UI" pitchFamily="34" charset="-120"/>
-              </a:rPr>
-              <a:t>各地に広げていく</a:t>
-            </a:r>
-            <a:endParaRPr lang="en-US" sz="1050" dirty="0"/>
-          </a:p>
-        </p:txBody>
-      </p:sp>
-      <p:sp>
-        <p:nvSpPr>
-          <p:cNvPr id="26" name="Shape 24"/>
-          <p:cNvSpPr/>
-          <p:nvPr/>
-        </p:nvSpPr>
-        <p:spPr>
-          <a:xfrm>
-            <a:off x="6766560" y="1417320"/>
-            <a:ext cx="1920240" cy="2148840"/>
-          </a:xfrm>
-          <a:prstGeom prst="roundRect">
-            <a:avLst>
-              <a:gd name="adj" fmla="val 5714"/>
-            </a:avLst>
-          </a:prstGeom>
-          <a:solidFill>
-            <a:srgbClr val="F4F6FA"/>
-          </a:solidFill>
-          <a:ln w="12700">
-            <a:solidFill>
-              <a:srgbClr val="F4F6FA"/>
-            </a:solidFill>
-            <a:prstDash val="solid"/>
-          </a:ln>
-        </p:spPr>
-      </p:sp>
-      <p:sp>
-        <p:nvSpPr>
-          <p:cNvPr id="27" name="Shape 25"/>
-          <p:cNvSpPr/>
-          <p:nvPr/>
-        </p:nvSpPr>
-        <p:spPr>
-          <a:xfrm>
-            <a:off x="6949440" y="1618488"/>
-            <a:ext cx="868680" cy="292608"/>
-          </a:xfrm>
-          <a:prstGeom prst="roundRect">
-            <a:avLst>
-              <a:gd name="adj" fmla="val 50000"/>
-            </a:avLst>
-          </a:prstGeom>
-          <a:solidFill>
-            <a:srgbClr val="9A6BC4"/>
-          </a:solidFill>
-          <a:ln w="12700">
-            <a:solidFill>
-              <a:srgbClr val="9A6BC4"/>
-            </a:solidFill>
-            <a:prstDash val="solid"/>
-          </a:ln>
-        </p:spPr>
-      </p:sp>
-      <p:sp>
-        <p:nvSpPr>
-          <p:cNvPr id="28" name="Text 26"/>
-          <p:cNvSpPr txBox="1"/>
-          <p:nvPr/>
-        </p:nvSpPr>
-        <p:spPr>
-          <a:xfrm>
-            <a:off x="6949440" y="1618488"/>
-            <a:ext cx="868680" cy="292608"/>
-          </a:xfrm>
-          <a:prstGeom prst="rect">
-            <a:avLst/>
-          </a:prstGeom>
-          <a:noFill/>
-          <a:ln/>
-        </p:spPr>
-        <p:txBody>
-          <a:bodyPr wrap="square" lIns="0" tIns="0" rIns="0" bIns="0" rtlCol="0" anchor="ctr"/>
-          <a:lstStyle/>
-          <a:p>
-            <a:pPr algn="ctr" indent="0" marL="0">
-              <a:buNone/>
-            </a:pPr>
-            <a:r>
-              <a:rPr lang="en-US" sz="1000" b="1" dirty="0">
-                <a:solidFill>
-                  <a:srgbClr val="FFFFFF"/>
-                </a:solidFill>
-                <a:latin typeface="Meiryo UI" pitchFamily="34" charset="0"/>
-                <a:ea typeface="Meiryo UI" pitchFamily="34" charset="-122"/>
-                <a:cs typeface="Meiryo UI" pitchFamily="34" charset="-120"/>
-              </a:rPr>
-              <a:t>GOAL</a:t>
-            </a:r>
-            <a:endParaRPr lang="en-US" sz="1000" dirty="0"/>
-          </a:p>
-        </p:txBody>
-      </p:sp>
-      <p:sp>
-        <p:nvSpPr>
-          <p:cNvPr id="29" name="Text 27"/>
-          <p:cNvSpPr txBox="1"/>
-          <p:nvPr/>
-        </p:nvSpPr>
-        <p:spPr>
-          <a:xfrm>
-            <a:off x="6949440" y="2057400"/>
-            <a:ext cx="1600200" cy="411480"/>
-          </a:xfrm>
-          <a:prstGeom prst="rect">
-            <a:avLst/>
-          </a:prstGeom>
-          <a:noFill/>
-          <a:ln/>
-        </p:spPr>
-        <p:txBody>
-          <a:bodyPr wrap="square" lIns="0" tIns="0" rIns="0" bIns="0" rtlCol="0" anchor="t"/>
-          <a:lstStyle/>
-          <a:p>
-            <a:pPr indent="0" marL="0">
-              <a:buNone/>
-            </a:pPr>
-            <a:r>
-              <a:rPr lang="en-US" sz="1700" b="1" dirty="0">
-                <a:solidFill>
-                  <a:srgbClr val="2E3440"/>
-                </a:solidFill>
-                <a:latin typeface="Meiryo UI" pitchFamily="34" charset="0"/>
-                <a:ea typeface="Meiryo UI" pitchFamily="34" charset="-122"/>
-                <a:cs typeface="Meiryo UI" pitchFamily="34" charset="-120"/>
-              </a:rPr>
-              <a:t>全国へ</a:t>
-            </a:r>
-            <a:endParaRPr lang="en-US" sz="1700" dirty="0"/>
-          </a:p>
-        </p:txBody>
-      </p:sp>
-      <p:sp>
-        <p:nvSpPr>
-          <p:cNvPr id="30" name="Text 28"/>
-          <p:cNvSpPr txBox="1"/>
-          <p:nvPr/>
-        </p:nvSpPr>
-        <p:spPr>
-          <a:xfrm>
-            <a:off x="6949440" y="2560320"/>
-            <a:ext cx="1691640" cy="914400"/>
-          </a:xfrm>
-          <a:prstGeom prst="rect">
-            <a:avLst/>
-          </a:prstGeom>
-          <a:noFill/>
-          <a:ln/>
-        </p:spPr>
-        <p:txBody>
-          <a:bodyPr wrap="square" lIns="0" tIns="0" rIns="0" bIns="0" rtlCol="0" anchor="t"/>
-          <a:lstStyle/>
-          <a:p>
-            <a:pPr indent="0" marL="0">
-              <a:lnSpc>
-                <a:spcPct val="115000"/>
-              </a:lnSpc>
-              <a:buNone/>
-            </a:pPr>
-            <a:r>
-              <a:rPr lang="en-US" sz="1050" dirty="0">
-                <a:solidFill>
-                  <a:srgbClr val="6B7280"/>
-                </a:solidFill>
-                <a:latin typeface="Meiryo UI" pitchFamily="34" charset="0"/>
-                <a:ea typeface="Meiryo UI" pitchFamily="34" charset="-122"/>
-                <a:cs typeface="Meiryo UI" pitchFamily="34" charset="-120"/>
-              </a:rPr>
-              <a:t>全国にキャレオスの</a:t>
-            </a:r>
-            <a:endParaRPr lang="en-US" sz="1050" dirty="0"/>
-          </a:p>
-          <a:p>
-            <a:pPr indent="0" marL="0">
-              <a:lnSpc>
-                <a:spcPct val="115000"/>
-              </a:lnSpc>
-              <a:buNone/>
-            </a:pPr>
-            <a:r>
-              <a:rPr lang="en-US" sz="1050" dirty="0">
-                <a:solidFill>
-                  <a:srgbClr val="6B7280"/>
-                </a:solidFill>
-                <a:latin typeface="Meiryo UI" pitchFamily="34" charset="0"/>
-                <a:ea typeface="Meiryo UI" pitchFamily="34" charset="-122"/>
-                <a:cs typeface="Meiryo UI" pitchFamily="34" charset="-120"/>
-              </a:rPr>
-              <a:t>トータルサポートを</a:t>
-            </a:r>
-            <a:endParaRPr lang="en-US" sz="1050" dirty="0"/>
-          </a:p>
-        </p:txBody>
-      </p:sp>
-      <p:sp>
-        <p:nvSpPr>
-          <p:cNvPr id="31" name="Shape 29"/>
-          <p:cNvSpPr/>
-          <p:nvPr/>
-        </p:nvSpPr>
-        <p:spPr>
-          <a:xfrm>
-            <a:off x="457200" y="3794760"/>
-            <a:ext cx="8229600" cy="777240"/>
-          </a:xfrm>
-          <a:prstGeom prst="roundRect">
-            <a:avLst>
-              <a:gd name="adj" fmla="val 14118"/>
-            </a:avLst>
-          </a:prstGeom>
-          <a:solidFill>
-            <a:srgbClr val="EEF1FB"/>
-          </a:solidFill>
-          <a:ln w="12700">
-            <a:solidFill>
-              <a:srgbClr val="EEF1FB"/>
-            </a:solidFill>
-            <a:prstDash val="solid"/>
-          </a:ln>
-        </p:spPr>
-      </p:sp>
-      <p:sp>
-        <p:nvSpPr>
-          <p:cNvPr id="32" name="Text 30"/>
-          <p:cNvSpPr txBox="1"/>
-          <p:nvPr/>
-        </p:nvSpPr>
-        <p:spPr>
-          <a:xfrm>
-            <a:off x="685800" y="3794760"/>
-            <a:ext cx="7772400" cy="777240"/>
-          </a:xfrm>
-          <a:prstGeom prst="rect">
-            <a:avLst/>
-          </a:prstGeom>
-          <a:noFill/>
-          <a:ln/>
-        </p:spPr>
-        <p:txBody>
-          <a:bodyPr wrap="square" lIns="0" tIns="0" rIns="0" bIns="0" rtlCol="0" anchor="ctr"/>
-          <a:lstStyle/>
-          <a:p>
-            <a:pPr indent="0" marL="0">
-              <a:buNone/>
-            </a:pPr>
-            <a:r>
-              <a:rPr lang="en-US" sz="1500" b="1" dirty="0">
-                <a:solidFill>
-                  <a:srgbClr val="4A6FC7"/>
-                </a:solidFill>
-                <a:latin typeface="Meiryo UI" pitchFamily="34" charset="0"/>
-                <a:ea typeface="Meiryo UI" pitchFamily="34" charset="-122"/>
-                <a:cs typeface="Meiryo UI" pitchFamily="34" charset="-120"/>
-              </a:rPr>
-              <a:t>まだキャレオスにいない人材・ポジション。そこを確立させることに価値がある。</a:t>
-            </a:r>
-            <a:endParaRPr lang="en-US" sz="1500" dirty="0"/>
+              <a:t>※人件費・家賃・初期投資は仮置きの試算。報酬は令和8年6月の見直し・新規指定事業所の特例（984/1000）を反映</a:t>
+            </a:r>
+            <a:endParaRPr lang="en-US" sz="900" dirty="0"/>
           </a:p>
         </p:txBody>
       </p:sp>
@@ -7853,6 +8012,1173 @@
 <file path=ppt/slides/slide8.xml><?xml version="1.0" encoding="utf-8"?>
 <p:sld xmlns:a="http://schemas.openxmlformats.org/drawingml/2006/main" xmlns:r="http://schemas.openxmlformats.org/officeDocument/2006/relationships" xmlns:p="http://schemas.openxmlformats.org/presentationml/2006/main">
   <p:cSld name="Slide 8">
+    <p:bg>
+      <p:bgPr>
+        <a:solidFill>
+          <a:srgbClr val="FFFFFF"/>
+        </a:solidFill>
+      </p:bgPr>
+    </p:bg>
+    <p:spTree>
+      <p:nvGrpSpPr>
+        <p:cNvPr id="1" name=""/>
+        <p:cNvGrpSpPr/>
+        <p:nvPr/>
+      </p:nvGrpSpPr>
+      <p:grpSpPr>
+        <a:xfrm>
+          <a:off x="0" y="0"/>
+          <a:ext cx="0" cy="0"/>
+          <a:chOff x="0" y="0"/>
+          <a:chExt cx="0" cy="0"/>
+        </a:xfrm>
+      </p:grpSpPr>
+      <p:sp>
+        <p:nvSpPr>
+          <p:cNvPr id="2" name="Shape 0"/>
+          <p:cNvSpPr/>
+          <p:nvPr/>
+        </p:nvSpPr>
+        <p:spPr>
+          <a:xfrm>
+            <a:off x="457200" y="384048"/>
+            <a:ext cx="100584" cy="100584"/>
+          </a:xfrm>
+          <a:prstGeom prst="ellipse">
+            <a:avLst/>
+          </a:prstGeom>
+          <a:solidFill>
+            <a:srgbClr val="E8505B"/>
+          </a:solidFill>
+          <a:ln w="12700">
+            <a:solidFill>
+              <a:srgbClr val="E8505B"/>
+            </a:solidFill>
+            <a:prstDash val="solid"/>
+          </a:ln>
+        </p:spPr>
+      </p:sp>
+      <p:sp>
+        <p:nvSpPr>
+          <p:cNvPr id="3" name="Shape 1"/>
+          <p:cNvSpPr/>
+          <p:nvPr/>
+        </p:nvSpPr>
+        <p:spPr>
+          <a:xfrm>
+            <a:off x="621792" y="384048"/>
+            <a:ext cx="100584" cy="100584"/>
+          </a:xfrm>
+          <a:prstGeom prst="ellipse">
+            <a:avLst/>
+          </a:prstGeom>
+          <a:solidFill>
+            <a:srgbClr val="F39C33"/>
+          </a:solidFill>
+          <a:ln w="12700">
+            <a:solidFill>
+              <a:srgbClr val="F39C33"/>
+            </a:solidFill>
+            <a:prstDash val="solid"/>
+          </a:ln>
+        </p:spPr>
+      </p:sp>
+      <p:sp>
+        <p:nvSpPr>
+          <p:cNvPr id="4" name="Shape 2"/>
+          <p:cNvSpPr/>
+          <p:nvPr/>
+        </p:nvSpPr>
+        <p:spPr>
+          <a:xfrm>
+            <a:off x="786384" y="384048"/>
+            <a:ext cx="100584" cy="100584"/>
+          </a:xfrm>
+          <a:prstGeom prst="ellipse">
+            <a:avLst/>
+          </a:prstGeom>
+          <a:solidFill>
+            <a:srgbClr val="F2C230"/>
+          </a:solidFill>
+          <a:ln w="12700">
+            <a:solidFill>
+              <a:srgbClr val="F2C230"/>
+            </a:solidFill>
+            <a:prstDash val="solid"/>
+          </a:ln>
+        </p:spPr>
+      </p:sp>
+      <p:sp>
+        <p:nvSpPr>
+          <p:cNvPr id="5" name="Shape 3"/>
+          <p:cNvSpPr/>
+          <p:nvPr/>
+        </p:nvSpPr>
+        <p:spPr>
+          <a:xfrm>
+            <a:off x="950976" y="384048"/>
+            <a:ext cx="100584" cy="100584"/>
+          </a:xfrm>
+          <a:prstGeom prst="ellipse">
+            <a:avLst/>
+          </a:prstGeom>
+          <a:solidFill>
+            <a:srgbClr val="5DBB63"/>
+          </a:solidFill>
+          <a:ln w="12700">
+            <a:solidFill>
+              <a:srgbClr val="5DBB63"/>
+            </a:solidFill>
+            <a:prstDash val="solid"/>
+          </a:ln>
+        </p:spPr>
+      </p:sp>
+      <p:sp>
+        <p:nvSpPr>
+          <p:cNvPr id="6" name="Shape 4"/>
+          <p:cNvSpPr/>
+          <p:nvPr/>
+        </p:nvSpPr>
+        <p:spPr>
+          <a:xfrm>
+            <a:off x="1115568" y="384048"/>
+            <a:ext cx="100584" cy="100584"/>
+          </a:xfrm>
+          <a:prstGeom prst="ellipse">
+            <a:avLst/>
+          </a:prstGeom>
+          <a:solidFill>
+            <a:srgbClr val="3FA7D6"/>
+          </a:solidFill>
+          <a:ln w="12700">
+            <a:solidFill>
+              <a:srgbClr val="3FA7D6"/>
+            </a:solidFill>
+            <a:prstDash val="solid"/>
+          </a:ln>
+        </p:spPr>
+      </p:sp>
+      <p:sp>
+        <p:nvSpPr>
+          <p:cNvPr id="7" name="Shape 5"/>
+          <p:cNvSpPr/>
+          <p:nvPr/>
+        </p:nvSpPr>
+        <p:spPr>
+          <a:xfrm>
+            <a:off x="1280160" y="384048"/>
+            <a:ext cx="100584" cy="100584"/>
+          </a:xfrm>
+          <a:prstGeom prst="ellipse">
+            <a:avLst/>
+          </a:prstGeom>
+          <a:solidFill>
+            <a:srgbClr val="4A6FC7"/>
+          </a:solidFill>
+          <a:ln w="12700">
+            <a:solidFill>
+              <a:srgbClr val="4A6FC7"/>
+            </a:solidFill>
+            <a:prstDash val="solid"/>
+          </a:ln>
+        </p:spPr>
+      </p:sp>
+      <p:sp>
+        <p:nvSpPr>
+          <p:cNvPr id="8" name="Shape 6"/>
+          <p:cNvSpPr/>
+          <p:nvPr/>
+        </p:nvSpPr>
+        <p:spPr>
+          <a:xfrm>
+            <a:off x="1444752" y="384048"/>
+            <a:ext cx="100584" cy="100584"/>
+          </a:xfrm>
+          <a:prstGeom prst="ellipse">
+            <a:avLst/>
+          </a:prstGeom>
+          <a:solidFill>
+            <a:srgbClr val="9A6BC4"/>
+          </a:solidFill>
+          <a:ln w="12700">
+            <a:solidFill>
+              <a:srgbClr val="9A6BC4"/>
+            </a:solidFill>
+            <a:prstDash val="solid"/>
+          </a:ln>
+        </p:spPr>
+      </p:sp>
+      <p:sp>
+        <p:nvSpPr>
+          <p:cNvPr id="9" name="Text 7"/>
+          <p:cNvSpPr txBox="1"/>
+          <p:nvPr/>
+        </p:nvSpPr>
+        <p:spPr>
+          <a:xfrm>
+            <a:off x="457200" y="530352"/>
+            <a:ext cx="8229600" cy="640080"/>
+          </a:xfrm>
+          <a:prstGeom prst="rect">
+            <a:avLst/>
+          </a:prstGeom>
+          <a:noFill/>
+          <a:ln/>
+        </p:spPr>
+        <p:txBody>
+          <a:bodyPr wrap="square" lIns="0" tIns="0" rIns="0" bIns="0" rtlCol="0" anchor="ctr"/>
+          <a:lstStyle/>
+          <a:p>
+            <a:pPr indent="0" marL="0">
+              <a:buNone/>
+            </a:pPr>
+            <a:r>
+              <a:rPr lang="en-US" sz="2600" b="1" dirty="0">
+                <a:solidFill>
+                  <a:srgbClr val="2E3440"/>
+                </a:solidFill>
+                <a:latin typeface="Meiryo UI" pitchFamily="34" charset="0"/>
+                <a:ea typeface="Meiryo UI" pitchFamily="34" charset="-122"/>
+                <a:cs typeface="Meiryo UI" pitchFamily="34" charset="-120"/>
+              </a:rPr>
+              <a:t>描く未来　― 愛媛から全国へ（仮構想）</a:t>
+            </a:r>
+            <a:endParaRPr lang="en-US" sz="2600" dirty="0"/>
+          </a:p>
+        </p:txBody>
+      </p:sp>
+      <p:sp>
+        <p:nvSpPr>
+          <p:cNvPr id="10" name="Text 8"/>
+          <p:cNvSpPr txBox="1"/>
+          <p:nvPr/>
+        </p:nvSpPr>
+        <p:spPr>
+          <a:xfrm>
+            <a:off x="8229600" y="4754880"/>
+            <a:ext cx="457200" cy="228600"/>
+          </a:xfrm>
+          <a:prstGeom prst="rect">
+            <a:avLst/>
+          </a:prstGeom>
+          <a:noFill/>
+          <a:ln/>
+        </p:spPr>
+        <p:txBody>
+          <a:bodyPr wrap="square" lIns="0" tIns="0" rIns="0" bIns="0" rtlCol="0" anchor="ctr"/>
+          <a:lstStyle/>
+          <a:p>
+            <a:pPr algn="r" indent="0" marL="0">
+              <a:buNone/>
+            </a:pPr>
+            <a:r>
+              <a:rPr lang="en-US" sz="1000" dirty="0">
+                <a:solidFill>
+                  <a:srgbClr val="6B7280"/>
+                </a:solidFill>
+                <a:latin typeface="Meiryo UI" pitchFamily="34" charset="0"/>
+                <a:ea typeface="Meiryo UI" pitchFamily="34" charset="-122"/>
+                <a:cs typeface="Meiryo UI" pitchFamily="34" charset="-120"/>
+              </a:rPr>
+              <a:t>8</a:t>
+            </a:r>
+            <a:endParaRPr lang="en-US" sz="1000" dirty="0"/>
+          </a:p>
+        </p:txBody>
+      </p:sp>
+      <p:sp>
+        <p:nvSpPr>
+          <p:cNvPr id="11" name="Shape 9"/>
+          <p:cNvSpPr/>
+          <p:nvPr/>
+        </p:nvSpPr>
+        <p:spPr>
+          <a:xfrm>
+            <a:off x="457200" y="1417320"/>
+            <a:ext cx="1920240" cy="2148840"/>
+          </a:xfrm>
+          <a:prstGeom prst="roundRect">
+            <a:avLst>
+              <a:gd name="adj" fmla="val 5714"/>
+            </a:avLst>
+          </a:prstGeom>
+          <a:solidFill>
+            <a:srgbClr val="F4F6FA"/>
+          </a:solidFill>
+          <a:ln w="12700">
+            <a:solidFill>
+              <a:srgbClr val="F4F6FA"/>
+            </a:solidFill>
+            <a:prstDash val="solid"/>
+          </a:ln>
+        </p:spPr>
+      </p:sp>
+      <p:sp>
+        <p:nvSpPr>
+          <p:cNvPr id="12" name="Shape 10"/>
+          <p:cNvSpPr/>
+          <p:nvPr/>
+        </p:nvSpPr>
+        <p:spPr>
+          <a:xfrm>
+            <a:off x="640080" y="1618488"/>
+            <a:ext cx="868680" cy="292608"/>
+          </a:xfrm>
+          <a:prstGeom prst="roundRect">
+            <a:avLst>
+              <a:gd name="adj" fmla="val 50000"/>
+            </a:avLst>
+          </a:prstGeom>
+          <a:solidFill>
+            <a:srgbClr val="E8505B"/>
+          </a:solidFill>
+          <a:ln w="12700">
+            <a:solidFill>
+              <a:srgbClr val="E8505B"/>
+            </a:solidFill>
+            <a:prstDash val="solid"/>
+          </a:ln>
+        </p:spPr>
+      </p:sp>
+      <p:sp>
+        <p:nvSpPr>
+          <p:cNvPr id="13" name="Text 11"/>
+          <p:cNvSpPr txBox="1"/>
+          <p:nvPr/>
+        </p:nvSpPr>
+        <p:spPr>
+          <a:xfrm>
+            <a:off x="640080" y="1618488"/>
+            <a:ext cx="868680" cy="292608"/>
+          </a:xfrm>
+          <a:prstGeom prst="rect">
+            <a:avLst/>
+          </a:prstGeom>
+          <a:noFill/>
+          <a:ln/>
+        </p:spPr>
+        <p:txBody>
+          <a:bodyPr wrap="square" lIns="0" tIns="0" rIns="0" bIns="0" rtlCol="0" anchor="ctr"/>
+          <a:lstStyle/>
+          <a:p>
+            <a:pPr algn="ctr" indent="0" marL="0">
+              <a:buNone/>
+            </a:pPr>
+            <a:r>
+              <a:rPr lang="en-US" sz="1000" b="1" dirty="0">
+                <a:solidFill>
+                  <a:srgbClr val="FFFFFF"/>
+                </a:solidFill>
+                <a:latin typeface="Meiryo UI" pitchFamily="34" charset="0"/>
+                <a:ea typeface="Meiryo UI" pitchFamily="34" charset="-122"/>
+                <a:cs typeface="Meiryo UI" pitchFamily="34" charset="-120"/>
+              </a:rPr>
+              <a:t>STEP 1</a:t>
+            </a:r>
+            <a:endParaRPr lang="en-US" sz="1000" dirty="0"/>
+          </a:p>
+        </p:txBody>
+      </p:sp>
+      <p:sp>
+        <p:nvSpPr>
+          <p:cNvPr id="14" name="Text 12"/>
+          <p:cNvSpPr txBox="1"/>
+          <p:nvPr/>
+        </p:nvSpPr>
+        <p:spPr>
+          <a:xfrm>
+            <a:off x="640080" y="2057400"/>
+            <a:ext cx="1600200" cy="411480"/>
+          </a:xfrm>
+          <a:prstGeom prst="rect">
+            <a:avLst/>
+          </a:prstGeom>
+          <a:noFill/>
+          <a:ln/>
+        </p:spPr>
+        <p:txBody>
+          <a:bodyPr wrap="square" lIns="0" tIns="0" rIns="0" bIns="0" rtlCol="0" anchor="t"/>
+          <a:lstStyle/>
+          <a:p>
+            <a:pPr indent="0" marL="0">
+              <a:buNone/>
+            </a:pPr>
+            <a:r>
+              <a:rPr lang="en-US" sz="1700" b="1" dirty="0">
+                <a:solidFill>
+                  <a:srgbClr val="2E3440"/>
+                </a:solidFill>
+                <a:latin typeface="Meiryo UI" pitchFamily="34" charset="0"/>
+                <a:ea typeface="Meiryo UI" pitchFamily="34" charset="-122"/>
+                <a:cs typeface="Meiryo UI" pitchFamily="34" charset="-120"/>
+              </a:rPr>
+              <a:t>愛媛で実践</a:t>
+            </a:r>
+            <a:endParaRPr lang="en-US" sz="1700" dirty="0"/>
+          </a:p>
+        </p:txBody>
+      </p:sp>
+      <p:sp>
+        <p:nvSpPr>
+          <p:cNvPr id="15" name="Text 13"/>
+          <p:cNvSpPr txBox="1"/>
+          <p:nvPr/>
+        </p:nvSpPr>
+        <p:spPr>
+          <a:xfrm>
+            <a:off x="640080" y="2560320"/>
+            <a:ext cx="1691640" cy="914400"/>
+          </a:xfrm>
+          <a:prstGeom prst="rect">
+            <a:avLst/>
+          </a:prstGeom>
+          <a:noFill/>
+          <a:ln/>
+        </p:spPr>
+        <p:txBody>
+          <a:bodyPr wrap="square" lIns="0" tIns="0" rIns="0" bIns="0" rtlCol="0" anchor="t"/>
+          <a:lstStyle/>
+          <a:p>
+            <a:pPr indent="0" marL="0">
+              <a:lnSpc>
+                <a:spcPct val="115000"/>
+              </a:lnSpc>
+              <a:buNone/>
+            </a:pPr>
+            <a:r>
+              <a:rPr lang="en-US" sz="1050" dirty="0">
+                <a:solidFill>
+                  <a:srgbClr val="6B7280"/>
+                </a:solidFill>
+                <a:latin typeface="Meiryo UI" pitchFamily="34" charset="0"/>
+                <a:ea typeface="Meiryo UI" pitchFamily="34" charset="-122"/>
+                <a:cs typeface="Meiryo UI" pitchFamily="34" charset="-120"/>
+              </a:rPr>
+              <a:t>B型を第一歩に、</a:t>
+            </a:r>
+            <a:endParaRPr lang="en-US" sz="1050" dirty="0"/>
+          </a:p>
+          <a:p>
+            <a:pPr indent="0" marL="0">
+              <a:lnSpc>
+                <a:spcPct val="115000"/>
+              </a:lnSpc>
+              <a:buNone/>
+            </a:pPr>
+            <a:r>
+              <a:rPr lang="en-US" sz="1050" dirty="0">
+                <a:solidFill>
+                  <a:srgbClr val="6B7280"/>
+                </a:solidFill>
+                <a:latin typeface="Meiryo UI" pitchFamily="34" charset="0"/>
+                <a:ea typeface="Meiryo UI" pitchFamily="34" charset="-122"/>
+                <a:cs typeface="Meiryo UI" pitchFamily="34" charset="-120"/>
+              </a:rPr>
+              <a:t>放デイ・児童クラブ・</a:t>
+            </a:r>
+            <a:endParaRPr lang="en-US" sz="1050" dirty="0"/>
+          </a:p>
+          <a:p>
+            <a:pPr indent="0" marL="0">
+              <a:lnSpc>
+                <a:spcPct val="115000"/>
+              </a:lnSpc>
+              <a:buNone/>
+            </a:pPr>
+            <a:r>
+              <a:rPr lang="en-US" sz="1050" dirty="0">
+                <a:solidFill>
+                  <a:srgbClr val="6B7280"/>
+                </a:solidFill>
+                <a:latin typeface="Meiryo UI" pitchFamily="34" charset="0"/>
+                <a:ea typeface="Meiryo UI" pitchFamily="34" charset="-122"/>
+                <a:cs typeface="Meiryo UI" pitchFamily="34" charset="-120"/>
+              </a:rPr>
+              <a:t>就労をつなぐ</a:t>
+            </a:r>
+            <a:endParaRPr lang="en-US" sz="1050" dirty="0"/>
+          </a:p>
+        </p:txBody>
+      </p:sp>
+      <p:sp>
+        <p:nvSpPr>
+          <p:cNvPr id="16" name="Shape 14"/>
+          <p:cNvSpPr/>
+          <p:nvPr/>
+        </p:nvSpPr>
+        <p:spPr>
+          <a:xfrm>
+            <a:off x="2560320" y="1417320"/>
+            <a:ext cx="1920240" cy="2148840"/>
+          </a:xfrm>
+          <a:prstGeom prst="roundRect">
+            <a:avLst>
+              <a:gd name="adj" fmla="val 5714"/>
+            </a:avLst>
+          </a:prstGeom>
+          <a:solidFill>
+            <a:srgbClr val="F4F6FA"/>
+          </a:solidFill>
+          <a:ln w="12700">
+            <a:solidFill>
+              <a:srgbClr val="F4F6FA"/>
+            </a:solidFill>
+            <a:prstDash val="solid"/>
+          </a:ln>
+        </p:spPr>
+      </p:sp>
+      <p:sp>
+        <p:nvSpPr>
+          <p:cNvPr id="17" name="Shape 15"/>
+          <p:cNvSpPr/>
+          <p:nvPr/>
+        </p:nvSpPr>
+        <p:spPr>
+          <a:xfrm>
+            <a:off x="2743200" y="1618488"/>
+            <a:ext cx="868680" cy="292608"/>
+          </a:xfrm>
+          <a:prstGeom prst="roundRect">
+            <a:avLst>
+              <a:gd name="adj" fmla="val 50000"/>
+            </a:avLst>
+          </a:prstGeom>
+          <a:solidFill>
+            <a:srgbClr val="F2C230"/>
+          </a:solidFill>
+          <a:ln w="12700">
+            <a:solidFill>
+              <a:srgbClr val="F2C230"/>
+            </a:solidFill>
+            <a:prstDash val="solid"/>
+          </a:ln>
+        </p:spPr>
+      </p:sp>
+      <p:sp>
+        <p:nvSpPr>
+          <p:cNvPr id="18" name="Text 16"/>
+          <p:cNvSpPr txBox="1"/>
+          <p:nvPr/>
+        </p:nvSpPr>
+        <p:spPr>
+          <a:xfrm>
+            <a:off x="2743200" y="1618488"/>
+            <a:ext cx="868680" cy="292608"/>
+          </a:xfrm>
+          <a:prstGeom prst="rect">
+            <a:avLst/>
+          </a:prstGeom>
+          <a:noFill/>
+          <a:ln/>
+        </p:spPr>
+        <p:txBody>
+          <a:bodyPr wrap="square" lIns="0" tIns="0" rIns="0" bIns="0" rtlCol="0" anchor="ctr"/>
+          <a:lstStyle/>
+          <a:p>
+            <a:pPr algn="ctr" indent="0" marL="0">
+              <a:buNone/>
+            </a:pPr>
+            <a:r>
+              <a:rPr lang="en-US" sz="1000" b="1" dirty="0">
+                <a:solidFill>
+                  <a:srgbClr val="FFFFFF"/>
+                </a:solidFill>
+                <a:latin typeface="Meiryo UI" pitchFamily="34" charset="0"/>
+                <a:ea typeface="Meiryo UI" pitchFamily="34" charset="-122"/>
+                <a:cs typeface="Meiryo UI" pitchFamily="34" charset="-120"/>
+              </a:rPr>
+              <a:t>STEP 2</a:t>
+            </a:r>
+            <a:endParaRPr lang="en-US" sz="1000" dirty="0"/>
+          </a:p>
+        </p:txBody>
+      </p:sp>
+      <p:sp>
+        <p:nvSpPr>
+          <p:cNvPr id="19" name="Text 17"/>
+          <p:cNvSpPr txBox="1"/>
+          <p:nvPr/>
+        </p:nvSpPr>
+        <p:spPr>
+          <a:xfrm>
+            <a:off x="2743200" y="2057400"/>
+            <a:ext cx="1600200" cy="411480"/>
+          </a:xfrm>
+          <a:prstGeom prst="rect">
+            <a:avLst/>
+          </a:prstGeom>
+          <a:noFill/>
+          <a:ln/>
+        </p:spPr>
+        <p:txBody>
+          <a:bodyPr wrap="square" lIns="0" tIns="0" rIns="0" bIns="0" rtlCol="0" anchor="t"/>
+          <a:lstStyle/>
+          <a:p>
+            <a:pPr indent="0" marL="0">
+              <a:buNone/>
+            </a:pPr>
+            <a:r>
+              <a:rPr lang="en-US" sz="1700" b="1" dirty="0">
+                <a:solidFill>
+                  <a:srgbClr val="2E3440"/>
+                </a:solidFill>
+                <a:latin typeface="Meiryo UI" pitchFamily="34" charset="0"/>
+                <a:ea typeface="Meiryo UI" pitchFamily="34" charset="-122"/>
+                <a:cs typeface="Meiryo UI" pitchFamily="34" charset="-120"/>
+              </a:rPr>
+              <a:t>四国支社</a:t>
+            </a:r>
+            <a:endParaRPr lang="en-US" sz="1700" dirty="0"/>
+          </a:p>
+        </p:txBody>
+      </p:sp>
+      <p:sp>
+        <p:nvSpPr>
+          <p:cNvPr id="20" name="Text 18"/>
+          <p:cNvSpPr txBox="1"/>
+          <p:nvPr/>
+        </p:nvSpPr>
+        <p:spPr>
+          <a:xfrm>
+            <a:off x="2743200" y="2560320"/>
+            <a:ext cx="1691640" cy="914400"/>
+          </a:xfrm>
+          <a:prstGeom prst="rect">
+            <a:avLst/>
+          </a:prstGeom>
+          <a:noFill/>
+          <a:ln/>
+        </p:spPr>
+        <p:txBody>
+          <a:bodyPr wrap="square" lIns="0" tIns="0" rIns="0" bIns="0" rtlCol="0" anchor="t"/>
+          <a:lstStyle/>
+          <a:p>
+            <a:pPr indent="0" marL="0">
+              <a:lnSpc>
+                <a:spcPct val="115000"/>
+              </a:lnSpc>
+              <a:buNone/>
+            </a:pPr>
+            <a:r>
+              <a:rPr lang="en-US" sz="1050" dirty="0">
+                <a:solidFill>
+                  <a:srgbClr val="6B7280"/>
+                </a:solidFill>
+                <a:latin typeface="Meiryo UI" pitchFamily="34" charset="0"/>
+                <a:ea typeface="Meiryo UI" pitchFamily="34" charset="-122"/>
+                <a:cs typeface="Meiryo UI" pitchFamily="34" charset="-120"/>
+              </a:rPr>
+              <a:t>愛媛から四国全域へ</a:t>
+            </a:r>
+            <a:endParaRPr lang="en-US" sz="1050" dirty="0"/>
+          </a:p>
+          <a:p>
+            <a:pPr indent="0" marL="0">
+              <a:lnSpc>
+                <a:spcPct val="115000"/>
+              </a:lnSpc>
+              <a:buNone/>
+            </a:pPr>
+            <a:r>
+              <a:rPr lang="en-US" sz="1050" dirty="0">
+                <a:solidFill>
+                  <a:srgbClr val="6B7280"/>
+                </a:solidFill>
+                <a:latin typeface="Meiryo UI" pitchFamily="34" charset="0"/>
+                <a:ea typeface="Meiryo UI" pitchFamily="34" charset="-122"/>
+                <a:cs typeface="Meiryo UI" pitchFamily="34" charset="-120"/>
+              </a:rPr>
+              <a:t>インドネシア特定技能</a:t>
+            </a:r>
+            <a:endParaRPr lang="en-US" sz="1050" dirty="0"/>
+          </a:p>
+          <a:p>
+            <a:pPr indent="0" marL="0">
+              <a:lnSpc>
+                <a:spcPct val="115000"/>
+              </a:lnSpc>
+              <a:buNone/>
+            </a:pPr>
+            <a:r>
+              <a:rPr lang="en-US" sz="1050" dirty="0">
+                <a:solidFill>
+                  <a:srgbClr val="6B7280"/>
+                </a:solidFill>
+                <a:latin typeface="Meiryo UI" pitchFamily="34" charset="0"/>
+                <a:ea typeface="Meiryo UI" pitchFamily="34" charset="-122"/>
+                <a:cs typeface="Meiryo UI" pitchFamily="34" charset="-120"/>
+              </a:rPr>
+              <a:t>等の人材も含めて</a:t>
+            </a:r>
+            <a:endParaRPr lang="en-US" sz="1050" dirty="0"/>
+          </a:p>
+        </p:txBody>
+      </p:sp>
+      <p:sp>
+        <p:nvSpPr>
+          <p:cNvPr id="21" name="Shape 19"/>
+          <p:cNvSpPr/>
+          <p:nvPr/>
+        </p:nvSpPr>
+        <p:spPr>
+          <a:xfrm>
+            <a:off x="4663440" y="1417320"/>
+            <a:ext cx="1920240" cy="2148840"/>
+          </a:xfrm>
+          <a:prstGeom prst="roundRect">
+            <a:avLst>
+              <a:gd name="adj" fmla="val 5714"/>
+            </a:avLst>
+          </a:prstGeom>
+          <a:solidFill>
+            <a:srgbClr val="F4F6FA"/>
+          </a:solidFill>
+          <a:ln w="12700">
+            <a:solidFill>
+              <a:srgbClr val="F4F6FA"/>
+            </a:solidFill>
+            <a:prstDash val="solid"/>
+          </a:ln>
+        </p:spPr>
+      </p:sp>
+      <p:sp>
+        <p:nvSpPr>
+          <p:cNvPr id="22" name="Shape 20"/>
+          <p:cNvSpPr/>
+          <p:nvPr/>
+        </p:nvSpPr>
+        <p:spPr>
+          <a:xfrm>
+            <a:off x="4846320" y="1618488"/>
+            <a:ext cx="868680" cy="292608"/>
+          </a:xfrm>
+          <a:prstGeom prst="roundRect">
+            <a:avLst>
+              <a:gd name="adj" fmla="val 50000"/>
+            </a:avLst>
+          </a:prstGeom>
+          <a:solidFill>
+            <a:srgbClr val="3FA7D6"/>
+          </a:solidFill>
+          <a:ln w="12700">
+            <a:solidFill>
+              <a:srgbClr val="3FA7D6"/>
+            </a:solidFill>
+            <a:prstDash val="solid"/>
+          </a:ln>
+        </p:spPr>
+      </p:sp>
+      <p:sp>
+        <p:nvSpPr>
+          <p:cNvPr id="23" name="Text 21"/>
+          <p:cNvSpPr txBox="1"/>
+          <p:nvPr/>
+        </p:nvSpPr>
+        <p:spPr>
+          <a:xfrm>
+            <a:off x="4846320" y="1618488"/>
+            <a:ext cx="868680" cy="292608"/>
+          </a:xfrm>
+          <a:prstGeom prst="rect">
+            <a:avLst/>
+          </a:prstGeom>
+          <a:noFill/>
+          <a:ln/>
+        </p:spPr>
+        <p:txBody>
+          <a:bodyPr wrap="square" lIns="0" tIns="0" rIns="0" bIns="0" rtlCol="0" anchor="ctr"/>
+          <a:lstStyle/>
+          <a:p>
+            <a:pPr algn="ctr" indent="0" marL="0">
+              <a:buNone/>
+            </a:pPr>
+            <a:r>
+              <a:rPr lang="en-US" sz="1000" b="1" dirty="0">
+                <a:solidFill>
+                  <a:srgbClr val="FFFFFF"/>
+                </a:solidFill>
+                <a:latin typeface="Meiryo UI" pitchFamily="34" charset="0"/>
+                <a:ea typeface="Meiryo UI" pitchFamily="34" charset="-122"/>
+                <a:cs typeface="Meiryo UI" pitchFamily="34" charset="-120"/>
+              </a:rPr>
+              <a:t>STEP 3</a:t>
+            </a:r>
+            <a:endParaRPr lang="en-US" sz="1000" dirty="0"/>
+          </a:p>
+        </p:txBody>
+      </p:sp>
+      <p:sp>
+        <p:nvSpPr>
+          <p:cNvPr id="24" name="Text 22"/>
+          <p:cNvSpPr txBox="1"/>
+          <p:nvPr/>
+        </p:nvSpPr>
+        <p:spPr>
+          <a:xfrm>
+            <a:off x="4846320" y="2057400"/>
+            <a:ext cx="1600200" cy="411480"/>
+          </a:xfrm>
+          <a:prstGeom prst="rect">
+            <a:avLst/>
+          </a:prstGeom>
+          <a:noFill/>
+          <a:ln/>
+        </p:spPr>
+        <p:txBody>
+          <a:bodyPr wrap="square" lIns="0" tIns="0" rIns="0" bIns="0" rtlCol="0" anchor="t"/>
+          <a:lstStyle/>
+          <a:p>
+            <a:pPr indent="0" marL="0">
+              <a:buNone/>
+            </a:pPr>
+            <a:r>
+              <a:rPr lang="en-US" sz="1700" b="1" dirty="0">
+                <a:solidFill>
+                  <a:srgbClr val="2E3440"/>
+                </a:solidFill>
+                <a:latin typeface="Meiryo UI" pitchFamily="34" charset="0"/>
+                <a:ea typeface="Meiryo UI" pitchFamily="34" charset="-122"/>
+                <a:cs typeface="Meiryo UI" pitchFamily="34" charset="-120"/>
+              </a:rPr>
+              <a:t>関西・中部支社</a:t>
+            </a:r>
+            <a:endParaRPr lang="en-US" sz="1700" dirty="0"/>
+          </a:p>
+        </p:txBody>
+      </p:sp>
+      <p:sp>
+        <p:nvSpPr>
+          <p:cNvPr id="25" name="Text 23"/>
+          <p:cNvSpPr txBox="1"/>
+          <p:nvPr/>
+        </p:nvSpPr>
+        <p:spPr>
+          <a:xfrm>
+            <a:off x="4846320" y="2560320"/>
+            <a:ext cx="1691640" cy="914400"/>
+          </a:xfrm>
+          <a:prstGeom prst="rect">
+            <a:avLst/>
+          </a:prstGeom>
+          <a:noFill/>
+          <a:ln/>
+        </p:spPr>
+        <p:txBody>
+          <a:bodyPr wrap="square" lIns="0" tIns="0" rIns="0" bIns="0" rtlCol="0" anchor="t"/>
+          <a:lstStyle/>
+          <a:p>
+            <a:pPr indent="0" marL="0">
+              <a:lnSpc>
+                <a:spcPct val="115000"/>
+              </a:lnSpc>
+              <a:buNone/>
+            </a:pPr>
+            <a:r>
+              <a:rPr lang="en-US" sz="1050" dirty="0">
+                <a:solidFill>
+                  <a:srgbClr val="6B7280"/>
+                </a:solidFill>
+                <a:latin typeface="Meiryo UI" pitchFamily="34" charset="0"/>
+                <a:ea typeface="Meiryo UI" pitchFamily="34" charset="-122"/>
+                <a:cs typeface="Meiryo UI" pitchFamily="34" charset="-120"/>
+              </a:rPr>
+              <a:t>エリアごとの拠点を</a:t>
+            </a:r>
+            <a:endParaRPr lang="en-US" sz="1050" dirty="0"/>
+          </a:p>
+          <a:p>
+            <a:pPr indent="0" marL="0">
+              <a:lnSpc>
+                <a:spcPct val="115000"/>
+              </a:lnSpc>
+              <a:buNone/>
+            </a:pPr>
+            <a:r>
+              <a:rPr lang="en-US" sz="1050" dirty="0">
+                <a:solidFill>
+                  <a:srgbClr val="6B7280"/>
+                </a:solidFill>
+                <a:latin typeface="Meiryo UI" pitchFamily="34" charset="0"/>
+                <a:ea typeface="Meiryo UI" pitchFamily="34" charset="-122"/>
+                <a:cs typeface="Meiryo UI" pitchFamily="34" charset="-120"/>
+              </a:rPr>
+              <a:t>各地に広げていく</a:t>
+            </a:r>
+            <a:endParaRPr lang="en-US" sz="1050" dirty="0"/>
+          </a:p>
+        </p:txBody>
+      </p:sp>
+      <p:sp>
+        <p:nvSpPr>
+          <p:cNvPr id="26" name="Shape 24"/>
+          <p:cNvSpPr/>
+          <p:nvPr/>
+        </p:nvSpPr>
+        <p:spPr>
+          <a:xfrm>
+            <a:off x="6766560" y="1417320"/>
+            <a:ext cx="1920240" cy="2148840"/>
+          </a:xfrm>
+          <a:prstGeom prst="roundRect">
+            <a:avLst>
+              <a:gd name="adj" fmla="val 5714"/>
+            </a:avLst>
+          </a:prstGeom>
+          <a:solidFill>
+            <a:srgbClr val="F4F6FA"/>
+          </a:solidFill>
+          <a:ln w="12700">
+            <a:solidFill>
+              <a:srgbClr val="F4F6FA"/>
+            </a:solidFill>
+            <a:prstDash val="solid"/>
+          </a:ln>
+        </p:spPr>
+      </p:sp>
+      <p:sp>
+        <p:nvSpPr>
+          <p:cNvPr id="27" name="Shape 25"/>
+          <p:cNvSpPr/>
+          <p:nvPr/>
+        </p:nvSpPr>
+        <p:spPr>
+          <a:xfrm>
+            <a:off x="6949440" y="1618488"/>
+            <a:ext cx="868680" cy="292608"/>
+          </a:xfrm>
+          <a:prstGeom prst="roundRect">
+            <a:avLst>
+              <a:gd name="adj" fmla="val 50000"/>
+            </a:avLst>
+          </a:prstGeom>
+          <a:solidFill>
+            <a:srgbClr val="9A6BC4"/>
+          </a:solidFill>
+          <a:ln w="12700">
+            <a:solidFill>
+              <a:srgbClr val="9A6BC4"/>
+            </a:solidFill>
+            <a:prstDash val="solid"/>
+          </a:ln>
+        </p:spPr>
+      </p:sp>
+      <p:sp>
+        <p:nvSpPr>
+          <p:cNvPr id="28" name="Text 26"/>
+          <p:cNvSpPr txBox="1"/>
+          <p:nvPr/>
+        </p:nvSpPr>
+        <p:spPr>
+          <a:xfrm>
+            <a:off x="6949440" y="1618488"/>
+            <a:ext cx="868680" cy="292608"/>
+          </a:xfrm>
+          <a:prstGeom prst="rect">
+            <a:avLst/>
+          </a:prstGeom>
+          <a:noFill/>
+          <a:ln/>
+        </p:spPr>
+        <p:txBody>
+          <a:bodyPr wrap="square" lIns="0" tIns="0" rIns="0" bIns="0" rtlCol="0" anchor="ctr"/>
+          <a:lstStyle/>
+          <a:p>
+            <a:pPr algn="ctr" indent="0" marL="0">
+              <a:buNone/>
+            </a:pPr>
+            <a:r>
+              <a:rPr lang="en-US" sz="1000" b="1" dirty="0">
+                <a:solidFill>
+                  <a:srgbClr val="FFFFFF"/>
+                </a:solidFill>
+                <a:latin typeface="Meiryo UI" pitchFamily="34" charset="0"/>
+                <a:ea typeface="Meiryo UI" pitchFamily="34" charset="-122"/>
+                <a:cs typeface="Meiryo UI" pitchFamily="34" charset="-120"/>
+              </a:rPr>
+              <a:t>GOAL</a:t>
+            </a:r>
+            <a:endParaRPr lang="en-US" sz="1000" dirty="0"/>
+          </a:p>
+        </p:txBody>
+      </p:sp>
+      <p:sp>
+        <p:nvSpPr>
+          <p:cNvPr id="29" name="Text 27"/>
+          <p:cNvSpPr txBox="1"/>
+          <p:nvPr/>
+        </p:nvSpPr>
+        <p:spPr>
+          <a:xfrm>
+            <a:off x="6949440" y="2057400"/>
+            <a:ext cx="1600200" cy="411480"/>
+          </a:xfrm>
+          <a:prstGeom prst="rect">
+            <a:avLst/>
+          </a:prstGeom>
+          <a:noFill/>
+          <a:ln/>
+        </p:spPr>
+        <p:txBody>
+          <a:bodyPr wrap="square" lIns="0" tIns="0" rIns="0" bIns="0" rtlCol="0" anchor="t"/>
+          <a:lstStyle/>
+          <a:p>
+            <a:pPr indent="0" marL="0">
+              <a:buNone/>
+            </a:pPr>
+            <a:r>
+              <a:rPr lang="en-US" sz="1700" b="1" dirty="0">
+                <a:solidFill>
+                  <a:srgbClr val="2E3440"/>
+                </a:solidFill>
+                <a:latin typeface="Meiryo UI" pitchFamily="34" charset="0"/>
+                <a:ea typeface="Meiryo UI" pitchFamily="34" charset="-122"/>
+                <a:cs typeface="Meiryo UI" pitchFamily="34" charset="-120"/>
+              </a:rPr>
+              <a:t>全国へ</a:t>
+            </a:r>
+            <a:endParaRPr lang="en-US" sz="1700" dirty="0"/>
+          </a:p>
+        </p:txBody>
+      </p:sp>
+      <p:sp>
+        <p:nvSpPr>
+          <p:cNvPr id="30" name="Text 28"/>
+          <p:cNvSpPr txBox="1"/>
+          <p:nvPr/>
+        </p:nvSpPr>
+        <p:spPr>
+          <a:xfrm>
+            <a:off x="6949440" y="2560320"/>
+            <a:ext cx="1691640" cy="914400"/>
+          </a:xfrm>
+          <a:prstGeom prst="rect">
+            <a:avLst/>
+          </a:prstGeom>
+          <a:noFill/>
+          <a:ln/>
+        </p:spPr>
+        <p:txBody>
+          <a:bodyPr wrap="square" lIns="0" tIns="0" rIns="0" bIns="0" rtlCol="0" anchor="t"/>
+          <a:lstStyle/>
+          <a:p>
+            <a:pPr indent="0" marL="0">
+              <a:lnSpc>
+                <a:spcPct val="115000"/>
+              </a:lnSpc>
+              <a:buNone/>
+            </a:pPr>
+            <a:r>
+              <a:rPr lang="en-US" sz="1050" dirty="0">
+                <a:solidFill>
+                  <a:srgbClr val="6B7280"/>
+                </a:solidFill>
+                <a:latin typeface="Meiryo UI" pitchFamily="34" charset="0"/>
+                <a:ea typeface="Meiryo UI" pitchFamily="34" charset="-122"/>
+                <a:cs typeface="Meiryo UI" pitchFamily="34" charset="-120"/>
+              </a:rPr>
+              <a:t>全国にキャレオスの</a:t>
+            </a:r>
+            <a:endParaRPr lang="en-US" sz="1050" dirty="0"/>
+          </a:p>
+          <a:p>
+            <a:pPr indent="0" marL="0">
+              <a:lnSpc>
+                <a:spcPct val="115000"/>
+              </a:lnSpc>
+              <a:buNone/>
+            </a:pPr>
+            <a:r>
+              <a:rPr lang="en-US" sz="1050" dirty="0">
+                <a:solidFill>
+                  <a:srgbClr val="6B7280"/>
+                </a:solidFill>
+                <a:latin typeface="Meiryo UI" pitchFamily="34" charset="0"/>
+                <a:ea typeface="Meiryo UI" pitchFamily="34" charset="-122"/>
+                <a:cs typeface="Meiryo UI" pitchFamily="34" charset="-120"/>
+              </a:rPr>
+              <a:t>トータルサポートを</a:t>
+            </a:r>
+            <a:endParaRPr lang="en-US" sz="1050" dirty="0"/>
+          </a:p>
+        </p:txBody>
+      </p:sp>
+      <p:sp>
+        <p:nvSpPr>
+          <p:cNvPr id="31" name="Shape 29"/>
+          <p:cNvSpPr/>
+          <p:nvPr/>
+        </p:nvSpPr>
+        <p:spPr>
+          <a:xfrm>
+            <a:off x="457200" y="3794760"/>
+            <a:ext cx="8229600" cy="777240"/>
+          </a:xfrm>
+          <a:prstGeom prst="roundRect">
+            <a:avLst>
+              <a:gd name="adj" fmla="val 14118"/>
+            </a:avLst>
+          </a:prstGeom>
+          <a:solidFill>
+            <a:srgbClr val="EEF1FB"/>
+          </a:solidFill>
+          <a:ln w="12700">
+            <a:solidFill>
+              <a:srgbClr val="EEF1FB"/>
+            </a:solidFill>
+            <a:prstDash val="solid"/>
+          </a:ln>
+        </p:spPr>
+      </p:sp>
+      <p:sp>
+        <p:nvSpPr>
+          <p:cNvPr id="32" name="Text 30"/>
+          <p:cNvSpPr txBox="1"/>
+          <p:nvPr/>
+        </p:nvSpPr>
+        <p:spPr>
+          <a:xfrm>
+            <a:off x="685800" y="3794760"/>
+            <a:ext cx="7772400" cy="777240"/>
+          </a:xfrm>
+          <a:prstGeom prst="rect">
+            <a:avLst/>
+          </a:prstGeom>
+          <a:noFill/>
+          <a:ln/>
+        </p:spPr>
+        <p:txBody>
+          <a:bodyPr wrap="square" lIns="0" tIns="0" rIns="0" bIns="0" rtlCol="0" anchor="ctr"/>
+          <a:lstStyle/>
+          <a:p>
+            <a:pPr indent="0" marL="0">
+              <a:buNone/>
+            </a:pPr>
+            <a:r>
+              <a:rPr lang="en-US" sz="1500" b="1" dirty="0">
+                <a:solidFill>
+                  <a:srgbClr val="4A6FC7"/>
+                </a:solidFill>
+                <a:latin typeface="Meiryo UI" pitchFamily="34" charset="0"/>
+                <a:ea typeface="Meiryo UI" pitchFamily="34" charset="-122"/>
+                <a:cs typeface="Meiryo UI" pitchFamily="34" charset="-120"/>
+              </a:rPr>
+              <a:t>まだキャレオスにいない人材・ポジション。そこを確立させることに価値がある。</a:t>
+            </a:r>
+            <a:endParaRPr lang="en-US" sz="1500" dirty="0"/>
+          </a:p>
+        </p:txBody>
+      </p:sp>
+    </p:spTree>
+  </p:cSld>
+  <p:clrMapOvr>
+    <a:masterClrMapping/>
+  </p:clrMapOvr>
+</p:sld>
+</file>
+
+<file path=ppt/slides/slide9.xml><?xml version="1.0" encoding="utf-8"?>
+<p:sld xmlns:a="http://schemas.openxmlformats.org/drawingml/2006/main" xmlns:r="http://schemas.openxmlformats.org/officeDocument/2006/relationships" xmlns:p="http://schemas.openxmlformats.org/presentationml/2006/main">
+  <p:cSld name="Slide 9">
     <p:bg>
       <p:bgPr>
         <a:solidFill>
